--- a/system-design-101/vi/lessons/sd-13-024/slides/sd-13-024.pptx
+++ b/system-design-101/vi/lessons/sd-13-024/slides/sd-13-024.pptx
@@ -1798,7 +1798,7 @@
         <p:spPr>
           <a:xfrm>
             <a:off x="914400" y="1524000"/>
-            <a:ext cx="8191500" cy="3429000"/>
+            <a:ext cx="8191500" cy="4381500"/>
           </a:xfrm>
           <a:prstGeom prst="rect">
             <a:avLst/>
@@ -1807,17 +1807,17 @@
           <a:ln/>
         </p:spPr>
         <p:txBody>
-          <a:bodyPr wrap="square" lIns="0" tIns="53028" rIns="0" bIns="-53028" rtlCol="0" anchor="t"/>
+          <a:bodyPr wrap="square" lIns="0" tIns="72009" rIns="0" bIns="-72009" rtlCol="0" anchor="t"/>
           <a:lstStyle/>
           <a:p>
             <a:pPr algn="l" indent="0" marL="0">
               <a:lnSpc>
-                <a:spcPts val="6201"/>
+                <a:spcPts val="8424"/>
               </a:lnSpc>
               <a:buNone/>
             </a:pPr>
             <a:r>
-              <a:rPr lang="en-US" sz="5963" dirty="0" spc="-4" kern="0">
+              <a:rPr lang="en-US" sz="8100" dirty="0" spc="-7" kern="0">
                 <a:solidFill>
                   <a:srgbClr val="F3EEE3"/>
                 </a:solidFill>
@@ -1828,7 +1828,7 @@
               <a:t>Nginx</a:t>
             </a:r>
             <a:r>
-              <a:rPr lang="en-US" sz="5963" dirty="0" spc="-1" kern="0">
+              <a:rPr lang="en-US" sz="8100" dirty="0" spc="-2" kern="0">
                 <a:solidFill>
                   <a:srgbClr val="F3EEE3"/>
                 </a:solidFill>
@@ -1839,7 +1839,7 @@
               <a:t> làm</a:t>
             </a:r>
             <a:r>
-              <a:rPr lang="en-US" sz="5963" dirty="0" spc="-53" kern="0">
+              <a:rPr lang="en-US" sz="8100" dirty="0" spc="-70" kern="0">
                 <a:solidFill>
                   <a:srgbClr val="F3EEE3"/>
                 </a:solidFill>
@@ -1850,7 +1850,7 @@
               <a:t> reverse</a:t>
             </a:r>
             <a:r>
-              <a:rPr lang="en-US" sz="5963" dirty="0" spc="-60" kern="0">
+              <a:rPr lang="en-US" sz="8100" dirty="0" spc="-81" kern="0">
                 <a:solidFill>
                   <a:srgbClr val="F3EEE3"/>
                 </a:solidFill>
@@ -1861,7 +1861,7 @@
               <a:t> proxy</a:t>
             </a:r>
             <a:r>
-              <a:rPr lang="en-US" sz="5963" dirty="0" spc="2" kern="0">
+              <a:rPr lang="en-US" sz="8100" dirty="0" spc="1" kern="0">
                 <a:solidFill>
                   <a:srgbClr val="F3EEE3"/>
                 </a:solidFill>
@@ -1872,7 +1872,7 @@
               <a:t> cho</a:t>
             </a:r>
             <a:r>
-              <a:rPr lang="en-US" sz="5963" dirty="0" spc="-8" kern="0">
+              <a:rPr lang="en-US" sz="8100" dirty="0" spc="-10" kern="0">
                 <a:solidFill>
                   <a:srgbClr val="F3EEE3"/>
                 </a:solidFill>
@@ -1883,7 +1883,7 @@
               <a:t> một</a:t>
             </a:r>
             <a:r>
-              <a:rPr lang="en-US" sz="5963" dirty="0" spc="0" kern="0">
+              <a:rPr lang="en-US" sz="8100" dirty="0" spc="0" kern="0">
                 <a:solidFill>
                   <a:srgbClr val="F3EEE3"/>
                 </a:solidFill>
@@ -1894,7 +1894,7 @@
               <a:t> API:</a:t>
             </a:r>
             <a:r>
-              <a:rPr lang="en-US" sz="5963" dirty="0" spc="2" kern="0">
+              <a:rPr lang="en-US" sz="8100" dirty="0" spc="1" kern="0">
                 <a:solidFill>
                   <a:srgbClr val="F3EEE3"/>
                 </a:solidFill>
@@ -1905,7 +1905,7 @@
               <a:t> năm chỗ</a:t>
             </a:r>
             <a:r>
-              <a:rPr lang="en-US" sz="5963" dirty="0" spc="1" kern="0">
+              <a:rPr lang="en-US" sz="8100" dirty="0" spc="2" kern="0">
                 <a:solidFill>
                   <a:srgbClr val="F3EEE3"/>
                 </a:solidFill>
@@ -1916,7 +1916,7 @@
               <a:t> hay</a:t>
             </a:r>
             <a:r>
-              <a:rPr lang="en-US" sz="5963" dirty="0" spc="-2" kern="0">
+              <a:rPr lang="en-US" sz="8100" dirty="0" spc="-3" kern="0">
                 <a:solidFill>
                   <a:srgbClr val="F3EEE3"/>
                 </a:solidFill>
@@ -1926,7 +1926,7 @@
               </a:rPr>
               <a:t> sai</a:t>
             </a:r>
-            <a:endParaRPr lang="en-US" sz="5963" dirty="0"/>
+            <a:endParaRPr lang="en-US" sz="8100" dirty="0"/>
           </a:p>
         </p:txBody>
       </p:sp>
@@ -1938,7 +1938,7 @@
         </p:nvSpPr>
         <p:spPr>
           <a:xfrm>
-            <a:off x="914400" y="5715000"/>
+            <a:off x="914400" y="6286500"/>
             <a:ext cx="8191500" cy="1047750"/>
           </a:xfrm>
           <a:prstGeom prst="rect">
@@ -2129,7 +2129,7 @@
               <a:t> nhóm</a:t>
             </a:r>
             <a:r>
-              <a:rPr lang="en-US" sz="1650" dirty="0" spc="-3" kern="0">
+              <a:rPr lang="en-US" sz="1650" dirty="0" spc="-4" kern="0">
                 <a:solidFill>
                   <a:srgbClr val="9AA0B5"/>
                 </a:solidFill>
@@ -2137,10 +2137,10 @@
                 <a:ea typeface="Be Vietnam Pro" pitchFamily="34" charset="-122"/>
                 <a:cs typeface="Be Vietnam Pro" pitchFamily="34" charset="-120"/>
               </a:rPr>
-              <a:t> Quan</a:t>
-            </a:r>
-            <a:r>
-              <a:rPr lang="en-US" sz="1650" dirty="0" spc="-9" kern="0">
+              <a:t> DevOps</a:t>
+            </a:r>
+            <a:r>
+              <a:rPr lang="en-US" sz="1650" dirty="0" spc="-7" kern="0">
                 <a:solidFill>
                   <a:srgbClr val="9AA0B5"/>
                 </a:solidFill>
@@ -2148,7 +2148,7 @@
                 <a:ea typeface="Be Vietnam Pro" pitchFamily="34" charset="-122"/>
                 <a:cs typeface="Be Vietnam Pro" pitchFamily="34" charset="-120"/>
               </a:rPr>
-              <a:t> sát</a:t>
+              <a:t> và</a:t>
             </a:r>
             <a:r>
               <a:rPr lang="en-US" sz="1650" dirty="0" spc="3" kern="0">
@@ -2159,18 +2159,7 @@
                 <a:ea typeface="Be Vietnam Pro" pitchFamily="34" charset="-122"/>
                 <a:cs typeface="Be Vietnam Pro" pitchFamily="34" charset="-120"/>
               </a:rPr>
-              <a:t> hệ</a:t>
-            </a:r>
-            <a:r>
-              <a:rPr lang="en-US" sz="1650" dirty="0" spc="1" kern="0">
-                <a:solidFill>
-                  <a:srgbClr val="9AA0B5"/>
-                </a:solidFill>
-                <a:latin typeface="Be Vietnam Pro" pitchFamily="34" charset="0"/>
-                <a:ea typeface="Be Vietnam Pro" pitchFamily="34" charset="-122"/>
-                <a:cs typeface="Be Vietnam Pro" pitchFamily="34" charset="-120"/>
-              </a:rPr>
-              <a:t> thống</a:t>
+              <a:t> CI/CD</a:t>
             </a:r>
             <a:endParaRPr lang="en-US" sz="1650" dirty="0"/>
           </a:p>
@@ -5929,7 +5918,7 @@
         <p:spPr>
           <a:xfrm>
             <a:off x="914400" y="1333500"/>
-            <a:ext cx="16459200" cy="952500"/>
+            <a:ext cx="16459200" cy="1047750"/>
           </a:xfrm>
           <a:prstGeom prst="rect">
             <a:avLst/>
@@ -5945,7 +5934,7 @@
               <a:buNone/>
             </a:pPr>
             <a:r>
-              <a:rPr lang="en-US" sz="5400" dirty="0" spc="-5" kern="0">
+              <a:rPr lang="en-US" sz="6900" dirty="0" spc="-3" kern="0">
                 <a:solidFill>
                   <a:srgbClr val="F3EEE3"/>
                 </a:solidFill>
@@ -5956,7 +5945,7 @@
               <a:t>Nginx</a:t>
             </a:r>
             <a:r>
-              <a:rPr lang="en-US" sz="5400" dirty="0" spc="12" kern="0">
+              <a:rPr lang="en-US" sz="6900" dirty="0" spc="12" kern="0">
                 <a:solidFill>
                   <a:srgbClr val="F3EEE3"/>
                 </a:solidFill>
@@ -5967,7 +5956,7 @@
               <a:t> đổi</a:t>
             </a:r>
             <a:r>
-              <a:rPr lang="en-US" sz="5400" dirty="0" spc="-23" kern="0">
+              <a:rPr lang="en-US" sz="6900" dirty="0" spc="-26" kern="0">
                 <a:solidFill>
                   <a:srgbClr val="F3EEE3"/>
                 </a:solidFill>
@@ -5978,7 +5967,7 @@
               <a:t> gì</a:t>
             </a:r>
             <a:r>
-              <a:rPr lang="en-US" sz="5400" dirty="0" spc="-62" kern="0">
+              <a:rPr lang="en-US" sz="6900" dirty="0" spc="-79" kern="0">
                 <a:solidFill>
                   <a:srgbClr val="F3EEE3"/>
                 </a:solidFill>
@@ -5989,7 +5978,7 @@
               <a:t> trước</a:t>
             </a:r>
             <a:r>
-              <a:rPr lang="en-US" sz="5400" dirty="0" spc="-2" kern="0">
+              <a:rPr lang="en-US" sz="6900" dirty="0" spc="0" kern="0">
                 <a:solidFill>
                   <a:srgbClr val="F3EEE3"/>
                 </a:solidFill>
@@ -6000,7 +5989,7 @@
               <a:t> khi</a:t>
             </a:r>
             <a:r>
-              <a:rPr lang="en-US" sz="5400" dirty="0" spc="25" kern="0">
+              <a:rPr lang="en-US" sz="6900" dirty="0" spc="34" kern="0">
                 <a:solidFill>
                   <a:srgbClr val="F3EEE3"/>
                 </a:solidFill>
@@ -6011,7 +6000,7 @@
               <a:t> gửi</a:t>
             </a:r>
             <a:r>
-              <a:rPr lang="en-US" sz="5400" dirty="0" spc="-50" kern="0">
+              <a:rPr lang="en-US" sz="6900" dirty="0" spc="36" kern="0">
                 <a:solidFill>
                   <a:srgbClr val="F3EEE3"/>
                 </a:solidFill>
@@ -6019,20 +6008,9 @@
                 <a:ea typeface="Bricolage Grotesque ExtraBold" pitchFamily="34" charset="-122"/>
                 <a:cs typeface="Bricolage Grotesque ExtraBold" pitchFamily="34" charset="-120"/>
               </a:rPr>
-              <a:t> tới</a:t>
-            </a:r>
-            <a:r>
-              <a:rPr lang="en-US" sz="5400" dirty="0" spc="-15" kern="0">
-                <a:solidFill>
-                  <a:srgbClr val="F3EEE3"/>
-                </a:solidFill>
-                <a:latin typeface="Bricolage Grotesque ExtraBold" pitchFamily="34" charset="0"/>
-                <a:ea typeface="Bricolage Grotesque ExtraBold" pitchFamily="34" charset="-122"/>
-                <a:cs typeface="Bricolage Grotesque ExtraBold" pitchFamily="34" charset="-120"/>
-              </a:rPr>
-              <a:t> backend</a:t>
-            </a:r>
-            <a:endParaRPr lang="en-US" sz="5400" dirty="0"/>
+              <a:t> đi</a:t>
+            </a:r>
+            <a:endParaRPr lang="en-US" sz="6900" dirty="0"/>
           </a:p>
         </p:txBody>
       </p:sp>
@@ -7415,7 +7393,7 @@
         <p:spPr>
           <a:xfrm>
             <a:off x="914400" y="1333500"/>
-            <a:ext cx="16459200" cy="1143000"/>
+            <a:ext cx="16459200" cy="1047750"/>
           </a:xfrm>
           <a:prstGeom prst="rect">
             <a:avLst/>
@@ -7431,7 +7409,7 @@
               <a:buNone/>
             </a:pPr>
             <a:r>
-              <a:rPr lang="en-US" sz="6600" dirty="0" spc="-2" kern="0">
+              <a:rPr lang="en-US" sz="6900" dirty="0" spc="-2" kern="0">
                 <a:solidFill>
                   <a:srgbClr val="14161C"/>
                 </a:solidFill>
@@ -7439,10 +7417,10 @@
                 <a:ea typeface="Bricolage Grotesque ExtraBold" pitchFamily="34" charset="-122"/>
                 <a:cs typeface="Bricolage Grotesque ExtraBold" pitchFamily="34" charset="-120"/>
               </a:rPr>
-              <a:t>Hai</a:t>
-            </a:r>
-            <a:r>
-              <a:rPr lang="en-US" sz="6600" dirty="0" spc="0" kern="0">
+              <a:t>Hai mã</a:t>
+            </a:r>
+            <a:r>
+              <a:rPr lang="en-US" sz="6900" dirty="0" spc="-3" kern="0">
                 <a:solidFill>
                   <a:srgbClr val="14161C"/>
                 </a:solidFill>
@@ -7450,10 +7428,10 @@
                 <a:ea typeface="Bricolage Grotesque ExtraBold" pitchFamily="34" charset="-122"/>
                 <a:cs typeface="Bricolage Grotesque ExtraBold" pitchFamily="34" charset="-120"/>
               </a:rPr>
-              <a:t> mã</a:t>
-            </a:r>
-            <a:r>
-              <a:rPr lang="en-US" sz="6600" dirty="0" spc="-4" kern="0">
+              <a:t> lỗi,</a:t>
+            </a:r>
+            <a:r>
+              <a:rPr lang="en-US" sz="6900" dirty="0" spc="2" kern="0">
                 <a:solidFill>
                   <a:srgbClr val="14161C"/>
                 </a:solidFill>
@@ -7461,10 +7439,10 @@
                 <a:ea typeface="Bricolage Grotesque ExtraBold" pitchFamily="34" charset="-122"/>
                 <a:cs typeface="Bricolage Grotesque ExtraBold" pitchFamily="34" charset="-120"/>
               </a:rPr>
-              <a:t> lỗi,</a:t>
-            </a:r>
-            <a:r>
-              <a:rPr lang="en-US" sz="6600" dirty="0" spc="0" kern="0">
+              <a:t> hai</a:t>
+            </a:r>
+            <a:r>
+              <a:rPr lang="en-US" sz="6900" dirty="0" spc="4" kern="0">
                 <a:solidFill>
                   <a:srgbClr val="14161C"/>
                 </a:solidFill>
@@ -7472,10 +7450,10 @@
                 <a:ea typeface="Bricolage Grotesque ExtraBold" pitchFamily="34" charset="-122"/>
                 <a:cs typeface="Bricolage Grotesque ExtraBold" pitchFamily="34" charset="-120"/>
               </a:rPr>
-              <a:t> hai</a:t>
-            </a:r>
-            <a:r>
-              <a:rPr lang="en-US" sz="6600" dirty="0" spc="-1" kern="0">
+              <a:t> nguyên</a:t>
+            </a:r>
+            <a:r>
+              <a:rPr lang="en-US" sz="6900" dirty="0" spc="1" kern="0">
                 <a:solidFill>
                   <a:srgbClr val="14161C"/>
                 </a:solidFill>
@@ -7483,20 +7461,9 @@
                 <a:ea typeface="Bricolage Grotesque ExtraBold" pitchFamily="34" charset="-122"/>
                 <a:cs typeface="Bricolage Grotesque ExtraBold" pitchFamily="34" charset="-120"/>
               </a:rPr>
-              <a:t> nguyên</a:t>
-            </a:r>
-            <a:r>
-              <a:rPr lang="en-US" sz="6600" dirty="0" spc="-2" kern="0">
-                <a:solidFill>
-                  <a:srgbClr val="14161C"/>
-                </a:solidFill>
-                <a:latin typeface="Bricolage Grotesque ExtraBold" pitchFamily="34" charset="0"/>
-                <a:ea typeface="Bricolage Grotesque ExtraBold" pitchFamily="34" charset="-122"/>
-                <a:cs typeface="Bricolage Grotesque ExtraBold" pitchFamily="34" charset="-120"/>
-              </a:rPr>
               <a:t> nhân</a:t>
             </a:r>
-            <a:endParaRPr lang="en-US" sz="6600" dirty="0"/>
+            <a:endParaRPr lang="en-US" sz="6900" dirty="0"/>
           </a:p>
         </p:txBody>
       </p:sp>
@@ -8881,7 +8848,7 @@
         <p:spPr>
           <a:xfrm>
             <a:off x="914400" y="1333500"/>
-            <a:ext cx="16459200" cy="1143000"/>
+            <a:ext cx="16459200" cy="1047750"/>
           </a:xfrm>
           <a:prstGeom prst="rect">
             <a:avLst/>
@@ -8897,7 +8864,7 @@
               <a:buNone/>
             </a:pPr>
             <a:r>
-              <a:rPr lang="en-US" sz="6000" dirty="0" spc="9" kern="0">
+              <a:rPr lang="en-US" sz="6900" dirty="0" spc="15" kern="0">
                 <a:solidFill>
                   <a:srgbClr val="F3EEE3"/>
                 </a:solidFill>
@@ -8908,7 +8875,7 @@
               <a:t>Đừng</a:t>
             </a:r>
             <a:r>
-              <a:rPr lang="en-US" sz="6000" dirty="0" spc="0" kern="0">
+              <a:rPr lang="en-US" sz="6900" dirty="0" spc="-1" kern="0">
                 <a:solidFill>
                   <a:srgbClr val="F3EEE3"/>
                 </a:solidFill>
@@ -8919,7 +8886,7 @@
               <a:t> mở</a:t>
             </a:r>
             <a:r>
-              <a:rPr lang="en-US" sz="6000" dirty="0" spc="-36" kern="0">
+              <a:rPr lang="en-US" sz="6900" dirty="0" spc="-39" kern="0">
                 <a:solidFill>
                   <a:srgbClr val="F3EEE3"/>
                 </a:solidFill>
@@ -8930,7 +8897,7 @@
               <a:t> kết</a:t>
             </a:r>
             <a:r>
-              <a:rPr lang="en-US" sz="6000" dirty="0" spc="2" kern="0">
+              <a:rPr lang="en-US" sz="6900" dirty="0" spc="2" kern="0">
                 <a:solidFill>
                   <a:srgbClr val="F3EEE3"/>
                 </a:solidFill>
@@ -8941,7 +8908,7 @@
               <a:t> nối</a:t>
             </a:r>
             <a:r>
-              <a:rPr lang="en-US" sz="6000" dirty="0" spc="-27" kern="0">
+              <a:rPr lang="en-US" sz="6900" dirty="0" spc="-34" kern="0">
                 <a:solidFill>
                   <a:srgbClr val="F3EEE3"/>
                 </a:solidFill>
@@ -8952,7 +8919,7 @@
               <a:t> mới</a:t>
             </a:r>
             <a:r>
-              <a:rPr lang="en-US" sz="6000" dirty="0" spc="0" kern="0">
+              <a:rPr lang="en-US" sz="6900" dirty="0" spc="0" kern="0">
                 <a:solidFill>
                   <a:srgbClr val="F3EEE3"/>
                 </a:solidFill>
@@ -8960,10 +8927,10 @@
                 <a:ea typeface="Bricolage Grotesque ExtraBold" pitchFamily="34" charset="-122"/>
                 <a:cs typeface="Bricolage Grotesque ExtraBold" pitchFamily="34" charset="-120"/>
               </a:rPr>
-              <a:t> cho</a:t>
-            </a:r>
-            <a:r>
-              <a:rPr lang="en-US" sz="6000" dirty="0" spc="2" kern="0">
+              <a:t> mỗi</a:t>
+            </a:r>
+            <a:r>
+              <a:rPr lang="en-US" sz="6900" dirty="0" spc="-4" kern="0">
                 <a:solidFill>
                   <a:srgbClr val="F3EEE3"/>
                 </a:solidFill>
@@ -8971,20 +8938,9 @@
                 <a:ea typeface="Bricolage Grotesque ExtraBold" pitchFamily="34" charset="-122"/>
                 <a:cs typeface="Bricolage Grotesque ExtraBold" pitchFamily="34" charset="-120"/>
               </a:rPr>
-              <a:t> mỗi</a:t>
-            </a:r>
-            <a:r>
-              <a:rPr lang="en-US" sz="6000" dirty="0" spc="-6" kern="0">
-                <a:solidFill>
-                  <a:srgbClr val="F3EEE3"/>
-                </a:solidFill>
-                <a:latin typeface="Bricolage Grotesque ExtraBold" pitchFamily="34" charset="0"/>
-                <a:ea typeface="Bricolage Grotesque ExtraBold" pitchFamily="34" charset="-122"/>
-                <a:cs typeface="Bricolage Grotesque ExtraBold" pitchFamily="34" charset="-120"/>
-              </a:rPr>
               <a:t> request</a:t>
             </a:r>
-            <a:endParaRPr lang="en-US" sz="6000" dirty="0"/>
+            <a:endParaRPr lang="en-US" sz="6900" dirty="0"/>
           </a:p>
         </p:txBody>
       </p:sp>
@@ -11693,7 +11649,7 @@
         <p:spPr>
           <a:xfrm>
             <a:off x="914400" y="1333500"/>
-            <a:ext cx="16459200" cy="1143000"/>
+            <a:ext cx="16459200" cy="1047750"/>
           </a:xfrm>
           <a:prstGeom prst="rect">
             <a:avLst/>
@@ -11709,7 +11665,7 @@
               <a:buNone/>
             </a:pPr>
             <a:r>
-              <a:rPr lang="en-US" sz="6600" dirty="0" spc="0" kern="0">
+              <a:rPr lang="en-US" sz="6900" dirty="0" spc="0" kern="0">
                 <a:solidFill>
                   <a:srgbClr val="F3EEE3"/>
                 </a:solidFill>
@@ -11717,10 +11673,10 @@
                 <a:ea typeface="Bricolage Grotesque ExtraBold" pitchFamily="34" charset="-122"/>
                 <a:cs typeface="Bricolage Grotesque ExtraBold" pitchFamily="34" charset="-120"/>
               </a:rPr>
-              <a:t>Cấu</a:t>
-            </a:r>
-            <a:r>
-              <a:rPr lang="en-US" sz="6600" dirty="0" spc="-16" kern="0">
+              <a:t>Mẫu không</a:t>
+            </a:r>
+            <a:r>
+              <a:rPr lang="en-US" sz="6900" dirty="0" spc="2" kern="0">
                 <a:solidFill>
                   <a:srgbClr val="F3EEE3"/>
                 </a:solidFill>
@@ -11728,10 +11684,10 @@
                 <a:ea typeface="Bricolage Grotesque ExtraBold" pitchFamily="34" charset="-122"/>
                 <a:cs typeface="Bricolage Grotesque ExtraBold" pitchFamily="34" charset="-120"/>
               </a:rPr>
-              <a:t> hình</a:t>
-            </a:r>
-            <a:r>
-              <a:rPr lang="en-US" sz="6600" dirty="0" spc="0" kern="0">
+              <a:t> dùng</a:t>
+            </a:r>
+            <a:r>
+              <a:rPr lang="en-US" sz="6900" dirty="0" spc="4" kern="0">
                 <a:solidFill>
                   <a:srgbClr val="F3EEE3"/>
                 </a:solidFill>
@@ -11739,10 +11695,10 @@
                 <a:ea typeface="Bricolage Grotesque ExtraBold" pitchFamily="34" charset="-122"/>
                 <a:cs typeface="Bricolage Grotesque ExtraBold" pitchFamily="34" charset="-120"/>
               </a:rPr>
-              <a:t> mẫu</a:t>
-            </a:r>
-            <a:r>
-              <a:rPr lang="en-US" sz="6600" dirty="0" spc="-1" kern="0">
+              <a:t> nguyên</a:t>
+            </a:r>
+            <a:r>
+              <a:rPr lang="en-US" sz="6900" dirty="0" spc="-92" kern="0">
                 <a:solidFill>
                   <a:srgbClr val="F3EEE3"/>
                 </a:solidFill>
@@ -11750,31 +11706,9 @@
                 <a:ea typeface="Bricolage Grotesque ExtraBold" pitchFamily="34" charset="-122"/>
                 <a:cs typeface="Bricolage Grotesque ExtraBold" pitchFamily="34" charset="-120"/>
               </a:rPr>
-              <a:t> không</a:t>
-            </a:r>
-            <a:r>
-              <a:rPr lang="en-US" sz="6600" dirty="0" spc="0" kern="0">
-                <a:solidFill>
-                  <a:srgbClr val="F3EEE3"/>
-                </a:solidFill>
-                <a:latin typeface="Bricolage Grotesque ExtraBold" pitchFamily="34" charset="0"/>
-                <a:ea typeface="Bricolage Grotesque ExtraBold" pitchFamily="34" charset="-122"/>
-                <a:cs typeface="Bricolage Grotesque ExtraBold" pitchFamily="34" charset="-120"/>
-              </a:rPr>
-              <a:t> dùng nguyên</a:t>
-            </a:r>
-            <a:r>
-              <a:rPr lang="en-US" sz="6600" dirty="0" spc="-85" kern="0">
-                <a:solidFill>
-                  <a:srgbClr val="F3EEE3"/>
-                </a:solidFill>
-                <a:latin typeface="Bricolage Grotesque ExtraBold" pitchFamily="34" charset="0"/>
-                <a:ea typeface="Bricolage Grotesque ExtraBold" pitchFamily="34" charset="-122"/>
-                <a:cs typeface="Bricolage Grotesque ExtraBold" pitchFamily="34" charset="-120"/>
-              </a:rPr>
               <a:t> được</a:t>
             </a:r>
-            <a:endParaRPr lang="en-US" sz="6600" dirty="0"/>
+            <a:endParaRPr lang="en-US" sz="6900" dirty="0"/>
           </a:p>
         </p:txBody>
       </p:sp>
@@ -14532,7 +14466,7 @@
               <a:buNone/>
             </a:pPr>
             <a:r>
-              <a:rPr lang="en-US" sz="6000" dirty="0" spc="-2" kern="0">
+              <a:rPr lang="en-US" sz="6900" dirty="0" spc="-2" kern="0">
                 <a:solidFill>
                   <a:srgbClr val="14161C"/>
                 </a:solidFill>
@@ -14543,7 +14477,7 @@
               <a:t>Năm</a:t>
             </a:r>
             <a:r>
-              <a:rPr lang="en-US" sz="6000" dirty="0" spc="1" kern="0">
+              <a:rPr lang="en-US" sz="6900" dirty="0" spc="0" kern="0">
                 <a:solidFill>
                   <a:srgbClr val="14161C"/>
                 </a:solidFill>
@@ -14554,7 +14488,7 @@
               <a:t> chi</a:t>
             </a:r>
             <a:r>
-              <a:rPr lang="en-US" sz="6000" dirty="0" spc="-1" kern="0">
+              <a:rPr lang="en-US" sz="6900" dirty="0" spc="2" kern="0">
                 <a:solidFill>
                   <a:srgbClr val="14161C"/>
                 </a:solidFill>
@@ -14565,7 +14499,7 @@
               <a:t> tiết</a:t>
             </a:r>
             <a:r>
-              <a:rPr lang="en-US" sz="6000" dirty="0" spc="5" kern="0">
+              <a:rPr lang="en-US" sz="6900" dirty="0" spc="8" kern="0">
                 <a:solidFill>
                   <a:srgbClr val="14161C"/>
                 </a:solidFill>
@@ -14576,7 +14510,7 @@
               <a:t> đáng</a:t>
             </a:r>
             <a:r>
-              <a:rPr lang="en-US" sz="6000" dirty="0" spc="-1" kern="0">
+              <a:rPr lang="en-US" sz="6900" dirty="0" spc="1" kern="0">
                 <a:solidFill>
                   <a:srgbClr val="14161C"/>
                 </a:solidFill>
@@ -14586,7 +14520,7 @@
               </a:rPr>
               <a:t> nhớ</a:t>
             </a:r>
-            <a:endParaRPr lang="en-US" sz="6000" dirty="0"/>
+            <a:endParaRPr lang="en-US" sz="6900" dirty="0"/>
           </a:p>
         </p:txBody>
       </p:sp>

--- a/system-design-101/vi/lessons/sd-13-024/slides/sd-13-024.pptx
+++ b/system-design-101/vi/lessons/sd-13-024/slides/sd-13-024.pptx
@@ -2258,7 +2258,7 @@
               <a:buNone/>
             </a:pPr>
             <a:r>
-              <a:rPr lang="en-US" sz="2400" b="1" dirty="0" spc="4" kern="0">
+              <a:rPr lang="en-US" sz="2550" b="1" dirty="0" spc="9" kern="0">
                 <a:solidFill>
                   <a:srgbClr val="F3EEE3"/>
                 </a:solidFill>
@@ -2269,7 +2269,7 @@
               <a:t>Đường</a:t>
             </a:r>
             <a:r>
-              <a:rPr lang="en-US" sz="2400" b="1" dirty="0" spc="0" kern="0">
+              <a:rPr lang="en-US" sz="2550" b="1" dirty="0" spc="-1" kern="0">
                 <a:solidFill>
                   <a:srgbClr val="F3EEE3"/>
                 </a:solidFill>
@@ -2277,10 +2277,10 @@
                 <a:ea typeface="Be Vietnam Pro" pitchFamily="34" charset="-122"/>
                 <a:cs typeface="Be Vietnam Pro" pitchFamily="34" charset="-120"/>
               </a:rPr>
-              <a:t> dẫn</a:t>
-            </a:r>
-            <a:r>
-              <a:rPr lang="en-US" sz="2400" b="1" dirty="0" spc="2" kern="0">
+              <a:t> dẫn bị</a:t>
+            </a:r>
+            <a:r>
+              <a:rPr lang="en-US" sz="2550" b="1" dirty="0" spc="5" kern="0">
                 <a:solidFill>
                   <a:srgbClr val="F3EEE3"/>
                 </a:solidFill>
@@ -2288,20 +2288,9 @@
                 <a:ea typeface="Be Vietnam Pro" pitchFamily="34" charset="-122"/>
                 <a:cs typeface="Be Vietnam Pro" pitchFamily="34" charset="-120"/>
               </a:rPr>
-              <a:t> bị</a:t>
-            </a:r>
-            <a:r>
-              <a:rPr lang="en-US" sz="2400" b="1" dirty="0" spc="7" kern="0">
-                <a:solidFill>
-                  <a:srgbClr val="F3EEE3"/>
-                </a:solidFill>
-                <a:latin typeface="Be Vietnam Pro" pitchFamily="34" charset="0"/>
-                <a:ea typeface="Be Vietnam Pro" pitchFamily="34" charset="-122"/>
-                <a:cs typeface="Be Vietnam Pro" pitchFamily="34" charset="-120"/>
-              </a:rPr>
               <a:t> đổi</a:t>
             </a:r>
-            <a:endParaRPr lang="en-US" sz="2400" dirty="0"/>
+            <a:endParaRPr lang="en-US" sz="2550" dirty="0"/>
           </a:p>
         </p:txBody>
       </p:sp>
@@ -2398,7 +2387,7 @@
               <a:buNone/>
             </a:pPr>
             <a:r>
-              <a:rPr lang="en-US" sz="2400" b="1" dirty="0" spc="-15" kern="0">
+              <a:rPr lang="en-US" sz="2550" b="1" dirty="0" spc="-15" kern="0">
                 <a:solidFill>
                   <a:srgbClr val="F3EEE3"/>
                 </a:solidFill>
@@ -2409,7 +2398,7 @@
               <a:t>Backend</a:t>
             </a:r>
             <a:r>
-              <a:rPr lang="en-US" sz="2400" b="1" dirty="0" spc="-9" kern="0">
+              <a:rPr lang="en-US" sz="2550" b="1" dirty="0" spc="-6" kern="0">
                 <a:solidFill>
                   <a:srgbClr val="F3EEE3"/>
                 </a:solidFill>
@@ -2420,7 +2409,7 @@
               <a:t> không</a:t>
             </a:r>
             <a:r>
-              <a:rPr lang="en-US" sz="2400" b="1" dirty="0" spc="-8" kern="0">
+              <a:rPr lang="en-US" sz="2550" b="1" dirty="0" spc="-8" kern="0">
                 <a:solidFill>
                   <a:srgbClr val="F3EEE3"/>
                 </a:solidFill>
@@ -2431,7 +2420,7 @@
               <a:t> thấy</a:t>
             </a:r>
             <a:r>
-              <a:rPr lang="en-US" sz="2400" b="1" dirty="0" spc="-6" kern="0">
+              <a:rPr lang="en-US" sz="2550" b="1" dirty="0" spc="-4" kern="0">
                 <a:solidFill>
                   <a:srgbClr val="F3EEE3"/>
                 </a:solidFill>
@@ -2442,7 +2431,7 @@
               <a:t> client</a:t>
             </a:r>
             <a:r>
-              <a:rPr lang="en-US" sz="2400" b="1" dirty="0" spc="-5" kern="0">
+              <a:rPr lang="en-US" sz="2550" b="1" dirty="0" spc="-5" kern="0">
                 <a:solidFill>
                   <a:srgbClr val="F3EEE3"/>
                 </a:solidFill>
@@ -2452,7 +2441,7 @@
               </a:rPr>
               <a:t> thật</a:t>
             </a:r>
-            <a:endParaRPr lang="en-US" sz="2400" dirty="0"/>
+            <a:endParaRPr lang="en-US" sz="2550" dirty="0"/>
           </a:p>
         </p:txBody>
       </p:sp>
@@ -2549,7 +2538,7 @@
               <a:buNone/>
             </a:pPr>
             <a:r>
-              <a:rPr lang="en-US" sz="2400" b="1" dirty="0" spc="-20" kern="0">
+              <a:rPr lang="en-US" sz="2550" b="1" dirty="0" spc="-21" kern="0">
                 <a:solidFill>
                   <a:srgbClr val="F3EEE3"/>
                 </a:solidFill>
@@ -2560,7 +2549,7 @@
               <a:t>Lỗi</a:t>
             </a:r>
             <a:r>
-              <a:rPr lang="en-US" sz="2400" b="1" dirty="0" spc="3" kern="0">
+              <a:rPr lang="en-US" sz="2550" b="1" dirty="0" spc="1" kern="0">
                 <a:solidFill>
                   <a:srgbClr val="F3EEE3"/>
                 </a:solidFill>
@@ -2571,7 +2560,7 @@
               <a:t> 502</a:t>
             </a:r>
             <a:r>
-              <a:rPr lang="en-US" sz="2400" b="1" dirty="0" spc="-18" kern="0">
+              <a:rPr lang="en-US" sz="2550" b="1" dirty="0" spc="-20" kern="0">
                 <a:solidFill>
                   <a:srgbClr val="F3EEE3"/>
                 </a:solidFill>
@@ -2582,7 +2571,7 @@
               <a:t> và</a:t>
             </a:r>
             <a:r>
-              <a:rPr lang="en-US" sz="2400" b="1" dirty="0" spc="2" kern="0">
+              <a:rPr lang="en-US" sz="2550" b="1" dirty="0" spc="-1" kern="0">
                 <a:solidFill>
                   <a:srgbClr val="F3EEE3"/>
                 </a:solidFill>
@@ -2592,7 +2581,7 @@
               </a:rPr>
               <a:t> 504</a:t>
             </a:r>
-            <a:endParaRPr lang="en-US" sz="2400" dirty="0"/>
+            <a:endParaRPr lang="en-US" sz="2550" dirty="0"/>
           </a:p>
         </p:txBody>
       </p:sp>
@@ -2689,7 +2678,7 @@
               <a:buNone/>
             </a:pPr>
             <a:r>
-              <a:rPr lang="en-US" sz="2400" b="1" dirty="0" spc="-2" kern="0">
+              <a:rPr lang="en-US" sz="2550" b="1" dirty="0" spc="-5" kern="0">
                 <a:solidFill>
                   <a:srgbClr val="F3EEE3"/>
                 </a:solidFill>
@@ -2700,7 +2689,7 @@
               <a:t>Mở</a:t>
             </a:r>
             <a:r>
-              <a:rPr lang="en-US" sz="2400" b="1" dirty="0" spc="-30" kern="0">
+              <a:rPr lang="en-US" sz="2550" b="1" dirty="0" spc="-30" kern="0">
                 <a:solidFill>
                   <a:srgbClr val="F3EEE3"/>
                 </a:solidFill>
@@ -2711,7 +2700,7 @@
               <a:t> kết</a:t>
             </a:r>
             <a:r>
-              <a:rPr lang="en-US" sz="2400" b="1" dirty="0" spc="-3" kern="0">
+              <a:rPr lang="en-US" sz="2550" b="1" dirty="0" spc="-2" kern="0">
                 <a:solidFill>
                   <a:srgbClr val="F3EEE3"/>
                 </a:solidFill>
@@ -2722,7 +2711,7 @@
               <a:t> nối</a:t>
             </a:r>
             <a:r>
-              <a:rPr lang="en-US" sz="2400" b="1" dirty="0" spc="3" kern="0">
+              <a:rPr lang="en-US" sz="2550" b="1" dirty="0" spc="3" kern="0">
                 <a:solidFill>
                   <a:srgbClr val="F3EEE3"/>
                 </a:solidFill>
@@ -2733,7 +2722,7 @@
               <a:t> mới</a:t>
             </a:r>
             <a:r>
-              <a:rPr lang="en-US" sz="2400" b="1" dirty="0" spc="-2" kern="0">
+              <a:rPr lang="en-US" sz="2550" b="1" dirty="0" spc="-3" kern="0">
                 <a:solidFill>
                   <a:srgbClr val="F3EEE3"/>
                 </a:solidFill>
@@ -2744,7 +2733,7 @@
               <a:t> mỗi</a:t>
             </a:r>
             <a:r>
-              <a:rPr lang="en-US" sz="2400" b="1" dirty="0" spc="-11" kern="0">
+              <a:rPr lang="en-US" sz="2550" b="1" dirty="0" spc="-12" kern="0">
                 <a:solidFill>
                   <a:srgbClr val="F3EEE3"/>
                 </a:solidFill>
@@ -2754,7 +2743,7 @@
               </a:rPr>
               <a:t> request</a:t>
             </a:r>
-            <a:endParaRPr lang="en-US" sz="2400" dirty="0"/>
+            <a:endParaRPr lang="en-US" sz="2550" dirty="0"/>
           </a:p>
         </p:txBody>
       </p:sp>
@@ -2851,7 +2840,7 @@
               <a:buNone/>
             </a:pPr>
             <a:r>
-              <a:rPr lang="en-US" sz="2400" b="1" dirty="0" spc="-1" kern="0">
+              <a:rPr lang="en-US" sz="2550" b="1" dirty="0" spc="2" kern="0">
                 <a:solidFill>
                   <a:srgbClr val="F3EEE3"/>
                 </a:solidFill>
@@ -2859,10 +2848,10 @@
                 <a:ea typeface="Be Vietnam Pro" pitchFamily="34" charset="-122"/>
                 <a:cs typeface="Be Vietnam Pro" pitchFamily="34" charset="-120"/>
               </a:rPr>
-              <a:t>Đổi</a:t>
-            </a:r>
-            <a:r>
-              <a:rPr lang="en-US" sz="2400" b="1" dirty="0" spc="0" kern="0">
+              <a:t>Đổi cấu</a:t>
+            </a:r>
+            <a:r>
+              <a:rPr lang="en-US" sz="2550" b="1" dirty="0" spc="-1" kern="0">
                 <a:solidFill>
                   <a:srgbClr val="F3EEE3"/>
                 </a:solidFill>
@@ -2870,10 +2859,10 @@
                 <a:ea typeface="Be Vietnam Pro" pitchFamily="34" charset="-122"/>
                 <a:cs typeface="Be Vietnam Pro" pitchFamily="34" charset="-120"/>
               </a:rPr>
-              <a:t> cấu</a:t>
-            </a:r>
-            <a:r>
-              <a:rPr lang="en-US" sz="2400" b="1" dirty="0" spc="-1" kern="0">
+              <a:t> hình</a:t>
+            </a:r>
+            <a:r>
+              <a:rPr lang="en-US" sz="2550" b="1" dirty="0" spc="0" kern="0">
                 <a:solidFill>
                   <a:srgbClr val="F3EEE3"/>
                 </a:solidFill>
@@ -2881,9 +2870,9 @@
                 <a:ea typeface="Be Vietnam Pro" pitchFamily="34" charset="-122"/>
                 <a:cs typeface="Be Vietnam Pro" pitchFamily="34" charset="-120"/>
               </a:rPr>
-              <a:t> hình liều</a:t>
-            </a:r>
-            <a:endParaRPr lang="en-US" sz="2400" dirty="0"/>
+              <a:t> liều</a:t>
+            </a:r>
+            <a:endParaRPr lang="en-US" sz="2550" dirty="0"/>
           </a:p>
         </p:txBody>
       </p:sp>
@@ -6268,7 +6257,7 @@
               <a:buNone/>
             </a:pPr>
             <a:r>
-              <a:rPr lang="en-US" sz="2250" b="1" dirty="0" kern="0">
+              <a:rPr lang="en-US" sz="2550" b="1" dirty="0" spc="5" kern="0">
                 <a:solidFill>
                   <a:srgbClr val="F3EEE3"/>
                 </a:solidFill>
@@ -6278,7 +6267,7 @@
               </a:rPr>
               <a:t>/api/users</a:t>
             </a:r>
-            <a:endParaRPr lang="en-US" sz="2250" dirty="0"/>
+            <a:endParaRPr lang="en-US" sz="2550" dirty="0"/>
           </a:p>
         </p:txBody>
       </p:sp>
@@ -6332,7 +6321,7 @@
               <a:buNone/>
             </a:pPr>
             <a:r>
-              <a:rPr lang="en-US" sz="2250" b="1" dirty="0" kern="0">
+              <a:rPr lang="en-US" sz="2550" b="1" dirty="0" spc="5" kern="0">
                 <a:solidFill>
                   <a:srgbClr val="7C93FF"/>
                 </a:solidFill>
@@ -6342,7 +6331,7 @@
               </a:rPr>
               <a:t>/users</a:t>
             </a:r>
-            <a:endParaRPr lang="en-US" sz="2250" dirty="0"/>
+            <a:endParaRPr lang="en-US" sz="2550" dirty="0"/>
           </a:p>
         </p:txBody>
       </p:sp>
@@ -8063,12 +8052,12 @@
           <a:ln/>
         </p:spPr>
         <p:txBody>
-          <a:bodyPr wrap="square" lIns="0" tIns="5334" rIns="0" bIns="-5334" rtlCol="0" anchor="t"/>
+          <a:bodyPr wrap="square" lIns="0" tIns="5667" rIns="0" bIns="-5667" rtlCol="0" anchor="t"/>
           <a:lstStyle/>
           <a:p>
-            <a:pPr algn="l" marL="304800" indent="-217761">
+            <a:pPr algn="l" marL="323850" indent="-231371">
               <a:lnSpc>
-                <a:spcPts val="3360"/>
+                <a:spcPts val="3570"/>
               </a:lnSpc>
               <a:spcAft>
                 <a:spcPts val="600"/>
@@ -8078,7 +8067,7 @@
               <a:buChar char="•"/>
             </a:pPr>
             <a:r>
-              <a:rPr lang="en-US" sz="2400" dirty="0" spc="0" kern="0">
+              <a:rPr lang="en-US" sz="2550" dirty="0" spc="-2" kern="0">
                 <a:solidFill>
                   <a:srgbClr val="F3EEE3"/>
                 </a:solidFill>
@@ -8089,7 +8078,7 @@
               <a:t>Header</a:t>
             </a:r>
             <a:r>
-              <a:rPr lang="en-US" sz="2400" dirty="0" spc="18" kern="0">
+              <a:rPr lang="en-US" sz="2550" dirty="0" spc="17" kern="0">
                 <a:solidFill>
                   <a:srgbClr val="F3EEE3"/>
                 </a:solidFill>
@@ -8100,7 +8089,7 @@
               <a:t> đã</a:t>
             </a:r>
             <a:r>
-              <a:rPr lang="en-US" sz="2400" dirty="0" spc="-11" kern="0">
+              <a:rPr lang="en-US" sz="2550" dirty="0" spc="-12" kern="0">
                 <a:solidFill>
                   <a:srgbClr val="F3EEE3"/>
                 </a:solidFill>
@@ -8111,7 +8100,7 @@
               <a:t> tới</a:t>
             </a:r>
             <a:r>
-              <a:rPr lang="en-US" sz="2400" dirty="0" spc="-6" kern="0">
+              <a:rPr lang="en-US" sz="2550" dirty="0" spc="-6" kern="0">
                 <a:solidFill>
                   <a:srgbClr val="F3EEE3"/>
                 </a:solidFill>
@@ -8122,7 +8111,7 @@
               <a:t> client,</a:t>
             </a:r>
             <a:r>
-              <a:rPr lang="en-US" sz="2400" dirty="0" spc="-15" kern="0">
+              <a:rPr lang="en-US" sz="2550" dirty="0" spc="-16" kern="0">
                 <a:solidFill>
                   <a:srgbClr val="F3EEE3"/>
                 </a:solidFill>
@@ -8133,7 +8122,7 @@
               <a:t> backend</a:t>
             </a:r>
             <a:r>
-              <a:rPr lang="en-US" sz="2400" dirty="0" spc="1" kern="0">
+              <a:rPr lang="en-US" sz="2550" dirty="0" spc="0" kern="0">
                 <a:solidFill>
                   <a:srgbClr val="F3EEE3"/>
                 </a:solidFill>
@@ -8144,7 +8133,7 @@
               <a:t> im</a:t>
             </a:r>
             <a:r>
-              <a:rPr lang="en-US" sz="2400" dirty="0" spc="2" kern="0">
+              <a:rPr lang="en-US" sz="2550" dirty="0" spc="1" kern="0">
                 <a:solidFill>
                   <a:srgbClr val="F3EEE3"/>
                 </a:solidFill>
@@ -8155,7 +8144,7 @@
               <a:t> lặng:</a:t>
             </a:r>
             <a:r>
-              <a:rPr lang="en-US" sz="2400" dirty="0" spc="12" kern="0">
+              <a:rPr lang="en-US" sz="2550" dirty="0" spc="11" kern="0">
                 <a:solidFill>
                   <a:srgbClr val="F3EEE3"/>
                 </a:solidFill>
@@ -8166,7 +8155,7 @@
               <a:t> đóng</a:t>
             </a:r>
             <a:r>
-              <a:rPr lang="en-US" sz="2400" dirty="0" spc="-34" kern="0">
+              <a:rPr lang="en-US" sz="2550" dirty="0" spc="-33" kern="0">
                 <a:solidFill>
                   <a:srgbClr val="F3EEE3"/>
                 </a:solidFill>
@@ -8177,7 +8166,7 @@
               <a:t> kết</a:t>
             </a:r>
             <a:r>
-              <a:rPr lang="en-US" sz="2400" dirty="0" spc="1" kern="0">
+              <a:rPr lang="en-US" sz="2550" dirty="0" spc="-2" kern="0">
                 <a:solidFill>
                   <a:srgbClr val="F3EEE3"/>
                 </a:solidFill>
@@ -8188,7 +8177,7 @@
               <a:t> nối,</a:t>
             </a:r>
             <a:r>
-              <a:rPr lang="en-US" sz="2400" dirty="0" spc="0" kern="0">
+              <a:rPr lang="en-US" sz="2550" dirty="0" spc="1" kern="0">
                 <a:solidFill>
                   <a:srgbClr val="F3EEE3"/>
                 </a:solidFill>
@@ -8196,21 +8185,32 @@
                 <a:ea typeface="Be Vietnam Pro" pitchFamily="34" charset="-122"/>
                 <a:cs typeface="Be Vietnam Pro" pitchFamily="34" charset="-120"/>
               </a:rPr>
-              <a:t> không 504.</a:t>
-            </a:r>
-            <a:endParaRPr lang="en-US" sz="2400" dirty="0"/>
+              <a:t> không</a:t>
+            </a:r>
+            <a:r>
+              <a:rPr lang="en-US" sz="2550" dirty="0" spc="-1" kern="0">
+                <a:solidFill>
+                  <a:srgbClr val="F3EEE3"/>
+                </a:solidFill>
+                <a:latin typeface="Be Vietnam Pro" pitchFamily="34" charset="0"/>
+                <a:ea typeface="Be Vietnam Pro" pitchFamily="34" charset="-122"/>
+                <a:cs typeface="Be Vietnam Pro" pitchFamily="34" charset="-120"/>
+              </a:rPr>
+              <a:t> 504.</a:t>
+            </a:r>
+            <a:endParaRPr lang="en-US" sz="2550" dirty="0"/>
           </a:p>
           <a:p>
-            <a:pPr algn="l" marL="304800" indent="-217761">
+            <a:pPr algn="l" marL="323850" indent="-231371">
               <a:lnSpc>
-                <a:spcPts val="3360"/>
+                <a:spcPts val="3570"/>
               </a:lnSpc>
               <a:buSzPct val="100000"/>
               <a:buFont typeface="Arial"/>
               <a:buChar char="•"/>
             </a:pPr>
             <a:r>
-              <a:rPr lang="en-US" sz="2400" dirty="0" spc="-15" kern="0">
+              <a:rPr lang="en-US" sz="2550" dirty="0" spc="-16" kern="0">
                 <a:solidFill>
                   <a:srgbClr val="F3EEE3"/>
                 </a:solidFill>
@@ -8221,7 +8221,7 @@
               <a:t>proxy_read_timeout</a:t>
             </a:r>
             <a:r>
-              <a:rPr lang="en-US" sz="2400" dirty="0" spc="0" kern="0">
+              <a:rPr lang="en-US" sz="2550" dirty="0" spc="2" kern="0">
                 <a:solidFill>
                   <a:srgbClr val="F3EEE3"/>
                 </a:solidFill>
@@ -8232,7 +8232,7 @@
               <a:t> chỉ</a:t>
             </a:r>
             <a:r>
-              <a:rPr lang="en-US" sz="2400" dirty="0" spc="18" kern="0">
+              <a:rPr lang="en-US" sz="2550" dirty="0" spc="16" kern="0">
                 <a:solidFill>
                   <a:srgbClr val="F3EEE3"/>
                 </a:solidFill>
@@ -8243,7 +8243,7 @@
               <a:t> đo</a:t>
             </a:r>
             <a:r>
-              <a:rPr lang="en-US" sz="2400" dirty="0" spc="0" kern="0">
+              <a:rPr lang="en-US" sz="2550" dirty="0" spc="-1" kern="0">
                 <a:solidFill>
                   <a:srgbClr val="F3EEE3"/>
                 </a:solidFill>
@@ -8254,7 +8254,7 @@
               <a:t> khoảng</a:t>
             </a:r>
             <a:r>
-              <a:rPr lang="en-US" sz="2400" dirty="0" spc="10" kern="0">
+              <a:rPr lang="en-US" sz="2550" dirty="0" spc="6" kern="0">
                 <a:solidFill>
                   <a:srgbClr val="F3EEE3"/>
                 </a:solidFill>
@@ -8265,7 +8265,7 @@
               <a:t> giữa</a:t>
             </a:r>
             <a:r>
-              <a:rPr lang="en-US" sz="2400" dirty="0" spc="0" kern="0">
+              <a:rPr lang="en-US" sz="2550" dirty="0" spc="-1" kern="0">
                 <a:solidFill>
                   <a:srgbClr val="F3EEE3"/>
                 </a:solidFill>
@@ -8276,7 +8276,7 @@
               <a:t> hai</a:t>
             </a:r>
             <a:r>
-              <a:rPr lang="en-US" sz="2400" dirty="0" spc="1" kern="0">
+              <a:rPr lang="en-US" sz="2550" dirty="0" spc="0" kern="0">
                 <a:solidFill>
                   <a:srgbClr val="F3EEE3"/>
                 </a:solidFill>
@@ -8287,7 +8287,7 @@
               <a:t> lần</a:t>
             </a:r>
             <a:r>
-              <a:rPr lang="en-US" sz="2400" dirty="0" spc="8" kern="0">
+              <a:rPr lang="en-US" sz="2550" dirty="0" spc="9" kern="0">
                 <a:solidFill>
                   <a:srgbClr val="F3EEE3"/>
                 </a:solidFill>
@@ -8297,7 +8297,7 @@
               </a:rPr>
               <a:t> đọc.</a:t>
             </a:r>
-            <a:endParaRPr lang="en-US" sz="2400" dirty="0"/>
+            <a:endParaRPr lang="en-US" sz="2550" dirty="0"/>
           </a:p>
         </p:txBody>
       </p:sp>
@@ -9057,7 +9057,7 @@
               <a:buNone/>
             </a:pPr>
             <a:r>
-              <a:rPr lang="en-US" sz="2400" b="1" dirty="0" spc="-15" kern="0">
+              <a:rPr lang="en-US" sz="2550" b="1" dirty="0" spc="-16" kern="0">
                 <a:solidFill>
                   <a:srgbClr val="9AA0B5"/>
                 </a:solidFill>
@@ -9068,7 +9068,7 @@
               <a:t>Trước</a:t>
             </a:r>
             <a:r>
-              <a:rPr lang="en-US" sz="2400" b="1" dirty="0" spc="0" kern="0">
+              <a:rPr lang="en-US" sz="2550" b="1" dirty="0" spc="0" kern="0">
                 <a:solidFill>
                   <a:srgbClr val="9AA0B5"/>
                 </a:solidFill>
@@ -9079,7 +9079,7 @@
               <a:t> bản</a:t>
             </a:r>
             <a:r>
-              <a:rPr lang="en-US" sz="2400" b="1" dirty="0" spc="-11" kern="0">
+              <a:rPr lang="en-US" sz="2550" b="1" dirty="0" spc="-12" kern="0">
                 <a:solidFill>
                   <a:srgbClr val="9AA0B5"/>
                 </a:solidFill>
@@ -9089,7 +9089,7 @@
               </a:rPr>
               <a:t> này</a:t>
             </a:r>
-            <a:endParaRPr lang="en-US" sz="2400" dirty="0"/>
+            <a:endParaRPr lang="en-US" sz="2550" dirty="0"/>
           </a:p>
         </p:txBody>
       </p:sp>
@@ -9118,7 +9118,7 @@
               <a:buNone/>
             </a:pPr>
             <a:r>
-              <a:rPr lang="en-US" sz="2400" b="1" dirty="0" spc="-83" kern="0">
+              <a:rPr lang="en-US" sz="2550" b="1" dirty="0" spc="-92" kern="0">
                 <a:solidFill>
                   <a:srgbClr val="9AA0B5"/>
                 </a:solidFill>
@@ -9129,7 +9129,7 @@
               <a:t>Từ</a:t>
             </a:r>
             <a:r>
-              <a:rPr lang="en-US" sz="2400" b="1" dirty="0" spc="0" kern="0">
+              <a:rPr lang="en-US" sz="2550" b="1" dirty="0" spc="0" kern="0">
                 <a:solidFill>
                   <a:srgbClr val="9AA0B5"/>
                 </a:solidFill>
@@ -9140,7 +9140,7 @@
               <a:t> bản</a:t>
             </a:r>
             <a:r>
-              <a:rPr lang="en-US" sz="2400" b="1" dirty="0" spc="-11" kern="0">
+              <a:rPr lang="en-US" sz="2550" b="1" dirty="0" spc="-12" kern="0">
                 <a:solidFill>
                   <a:srgbClr val="9AA0B5"/>
                 </a:solidFill>
@@ -9150,7 +9150,7 @@
               </a:rPr>
               <a:t> này</a:t>
             </a:r>
-            <a:endParaRPr lang="en-US" sz="2400" dirty="0"/>
+            <a:endParaRPr lang="en-US" sz="2550" dirty="0"/>
           </a:p>
         </p:txBody>
       </p:sp>
@@ -10601,17 +10601,17 @@
           <a:ln/>
         </p:spPr>
         <p:txBody>
-          <a:bodyPr wrap="square" lIns="0" tIns="12144" rIns="0" bIns="-12144" rtlCol="0" anchor="t"/>
+          <a:bodyPr wrap="square" lIns="0" tIns="13764" rIns="0" bIns="-13764" rtlCol="0" anchor="t"/>
           <a:lstStyle/>
           <a:p>
             <a:pPr algn="ctr" indent="0" marL="0">
               <a:lnSpc>
-                <a:spcPts val="2925"/>
+                <a:spcPts val="3315"/>
               </a:lnSpc>
               <a:buNone/>
             </a:pPr>
             <a:r>
-              <a:rPr lang="en-US" sz="2250" dirty="0" spc="-3" kern="0">
+              <a:rPr lang="en-US" sz="2550" dirty="0" spc="-1" kern="0">
                 <a:solidFill>
                   <a:srgbClr val="6B6A66"/>
                 </a:solidFill>
@@ -10622,7 +10622,7 @@
               <a:t>Kiểm</a:t>
             </a:r>
             <a:r>
-              <a:rPr lang="en-US" sz="2250" dirty="0" spc="-24" kern="0">
+              <a:rPr lang="en-US" sz="2550" dirty="0" spc="-25" kern="0">
                 <a:solidFill>
                   <a:srgbClr val="6B6A66"/>
                 </a:solidFill>
@@ -10633,7 +10633,7 @@
               <a:t> tra</a:t>
             </a:r>
             <a:r>
-              <a:rPr lang="en-US" sz="2250" dirty="0" spc="1" kern="0">
+              <a:rPr lang="en-US" sz="2550" dirty="0" spc="2" kern="0">
                 <a:solidFill>
                   <a:srgbClr val="6B6A66"/>
                 </a:solidFill>
@@ -10644,7 +10644,7 @@
               <a:t> cấu</a:t>
             </a:r>
             <a:r>
-              <a:rPr lang="en-US" sz="2250" dirty="0" spc="0" kern="0">
+              <a:rPr lang="en-US" sz="2550" dirty="0" spc="0" kern="0">
                 <a:solidFill>
                   <a:srgbClr val="6B6A66"/>
                 </a:solidFill>
@@ -10654,7 +10654,7 @@
               </a:rPr>
               <a:t> hình</a:t>
             </a:r>
-            <a:endParaRPr lang="en-US" sz="2250" dirty="0"/>
+            <a:endParaRPr lang="en-US" sz="2550" dirty="0"/>
           </a:p>
         </p:txBody>
       </p:sp>
@@ -10749,17 +10749,17 @@
           <a:ln/>
         </p:spPr>
         <p:txBody>
-          <a:bodyPr wrap="square" lIns="0" tIns="12144" rIns="0" bIns="-12144" rtlCol="0" anchor="t"/>
+          <a:bodyPr wrap="square" lIns="0" tIns="13764" rIns="0" bIns="-13764" rtlCol="0" anchor="t"/>
           <a:lstStyle/>
           <a:p>
             <a:pPr algn="ctr" indent="0" marL="0">
               <a:lnSpc>
-                <a:spcPts val="2925"/>
+                <a:spcPts val="3315"/>
               </a:lnSpc>
               <a:buNone/>
             </a:pPr>
             <a:r>
-              <a:rPr lang="en-US" sz="2250" dirty="0" spc="-1" kern="0">
+              <a:rPr lang="en-US" sz="2550" dirty="0" spc="2" kern="0">
                 <a:solidFill>
                   <a:srgbClr val="6B6A66"/>
                 </a:solidFill>
@@ -10767,10 +10767,10 @@
                 <a:ea typeface="Be Vietnam Pro" pitchFamily="34" charset="-122"/>
                 <a:cs typeface="Be Vietnam Pro" pitchFamily="34" charset="-120"/>
               </a:rPr>
-              <a:t>Nạp</a:t>
-            </a:r>
-            <a:r>
-              <a:rPr lang="en-US" sz="2250" dirty="0" spc="0" kern="0">
+              <a:t>Nạp cấu</a:t>
+            </a:r>
+            <a:r>
+              <a:rPr lang="en-US" sz="2550" dirty="0" spc="0" kern="0">
                 <a:solidFill>
                   <a:srgbClr val="6B6A66"/>
                 </a:solidFill>
@@ -10778,20 +10778,9 @@
                 <a:ea typeface="Be Vietnam Pro" pitchFamily="34" charset="-122"/>
                 <a:cs typeface="Be Vietnam Pro" pitchFamily="34" charset="-120"/>
               </a:rPr>
-              <a:t> cấu hình</a:t>
-            </a:r>
-            <a:r>
-              <a:rPr lang="en-US" sz="2250" dirty="0" spc="1" kern="0">
-                <a:solidFill>
-                  <a:srgbClr val="6B6A66"/>
-                </a:solidFill>
-                <a:latin typeface="Be Vietnam Pro" pitchFamily="34" charset="0"/>
-                <a:ea typeface="Be Vietnam Pro" pitchFamily="34" charset="-122"/>
-                <a:cs typeface="Be Vietnam Pro" pitchFamily="34" charset="-120"/>
-              </a:rPr>
-              <a:t> mới</a:t>
-            </a:r>
-            <a:endParaRPr lang="en-US" sz="2250" dirty="0"/>
+              <a:t> hình mới</a:t>
+            </a:r>
+            <a:endParaRPr lang="en-US" sz="2550" dirty="0"/>
           </a:p>
         </p:txBody>
       </p:sp>
@@ -10897,17 +10886,17 @@
           <a:ln/>
         </p:spPr>
         <p:txBody>
-          <a:bodyPr wrap="square" lIns="0" tIns="12144" rIns="0" bIns="-12144" rtlCol="0" anchor="t"/>
+          <a:bodyPr wrap="square" lIns="0" tIns="13764" rIns="0" bIns="-13764" rtlCol="0" anchor="t"/>
           <a:lstStyle/>
           <a:p>
             <a:pPr algn="ctr" indent="0" marL="0">
               <a:lnSpc>
-                <a:spcPts val="2925"/>
+                <a:spcPts val="3315"/>
               </a:lnSpc>
               <a:buNone/>
             </a:pPr>
             <a:r>
-              <a:rPr lang="en-US" sz="2250" dirty="0" spc="-34" kern="0">
+              <a:rPr lang="en-US" sz="2550" dirty="0" spc="-42" kern="0">
                 <a:solidFill>
                   <a:srgbClr val="6B6A66"/>
                 </a:solidFill>
@@ -10918,7 +10907,7 @@
               <a:t>Xử</a:t>
             </a:r>
             <a:r>
-              <a:rPr lang="en-US" sz="2250" dirty="0" spc="1" kern="0">
+              <a:rPr lang="en-US" sz="2550" dirty="0" spc="0" kern="0">
                 <a:solidFill>
                   <a:srgbClr val="6B6A66"/>
                 </a:solidFill>
@@ -10929,7 +10918,7 @@
               <a:t> lý</a:t>
             </a:r>
             <a:r>
-              <a:rPr lang="en-US" sz="2250" dirty="0" spc="-3" kern="0">
+              <a:rPr lang="en-US" sz="2550" dirty="0" spc="-6" kern="0">
                 <a:solidFill>
                   <a:srgbClr val="6B6A66"/>
                 </a:solidFill>
@@ -10940,7 +10929,7 @@
               <a:t> nốt</a:t>
             </a:r>
             <a:r>
-              <a:rPr lang="en-US" sz="2250" dirty="0" spc="-31" kern="0">
+              <a:rPr lang="en-US" sz="2550" dirty="0" spc="-33" kern="0">
                 <a:solidFill>
                   <a:srgbClr val="6B6A66"/>
                 </a:solidFill>
@@ -10951,7 +10940,7 @@
               <a:t> kết</a:t>
             </a:r>
             <a:r>
-              <a:rPr lang="en-US" sz="2250" dirty="0" spc="2" kern="0">
+              <a:rPr lang="en-US" sz="2550" dirty="0" spc="-1" kern="0">
                 <a:solidFill>
                   <a:srgbClr val="6B6A66"/>
                 </a:solidFill>
@@ -10962,7 +10951,7 @@
               <a:t> nối</a:t>
             </a:r>
             <a:r>
-              <a:rPr lang="en-US" sz="2250" dirty="0" spc="-23" kern="0">
+              <a:rPr lang="en-US" sz="2550" dirty="0" spc="-26" kern="0">
                 <a:solidFill>
                   <a:srgbClr val="6B6A66"/>
                 </a:solidFill>
@@ -10973,7 +10962,7 @@
               <a:t> rồi</a:t>
             </a:r>
             <a:r>
-              <a:rPr lang="en-US" sz="2250" dirty="0" spc="-11" kern="0">
+              <a:rPr lang="en-US" sz="2550" dirty="0" spc="-10" kern="0">
                 <a:solidFill>
                   <a:srgbClr val="6B6A66"/>
                 </a:solidFill>
@@ -10983,7 +10972,7 @@
               </a:rPr>
               <a:t> thoát</a:t>
             </a:r>
-            <a:endParaRPr lang="en-US" sz="2250" dirty="0"/>
+            <a:endParaRPr lang="en-US" sz="2550" dirty="0"/>
           </a:p>
         </p:txBody>
       </p:sp>
@@ -13805,17 +13794,17 @@
           <a:ln/>
         </p:spPr>
         <p:txBody>
-          <a:bodyPr wrap="square" lIns="0" tIns="5334" rIns="0" bIns="-5334" rtlCol="0" anchor="t"/>
+          <a:bodyPr wrap="square" lIns="0" tIns="5667" rIns="0" bIns="-5667" rtlCol="0" anchor="t"/>
           <a:lstStyle/>
           <a:p>
             <a:pPr algn="l" indent="0" marL="0">
               <a:lnSpc>
-                <a:spcPts val="3360"/>
+                <a:spcPts val="3570"/>
               </a:lnSpc>
               <a:buNone/>
             </a:pPr>
             <a:r>
-              <a:rPr lang="en-US" sz="2400" dirty="0" spc="-20" kern="0">
+              <a:rPr lang="en-US" sz="2550" dirty="0" spc="-20" kern="0">
                 <a:solidFill>
                   <a:srgbClr val="14161C"/>
                 </a:solidFill>
@@ -13826,7 +13815,7 @@
               <a:t>rewrite</a:t>
             </a:r>
             <a:r>
-              <a:rPr lang="en-US" sz="2400" dirty="0" spc="-24" kern="0">
+              <a:rPr lang="en-US" sz="2550" dirty="0" spc="-23" kern="0">
                 <a:solidFill>
                   <a:srgbClr val="14161C"/>
                 </a:solidFill>
@@ -13837,7 +13826,7 @@
               <a:t> ...</a:t>
             </a:r>
             <a:r>
-              <a:rPr lang="en-US" sz="2400" dirty="0" spc="-17" kern="0">
+              <a:rPr lang="en-US" sz="2550" dirty="0" spc="-18" kern="0">
                 <a:solidFill>
                   <a:srgbClr val="14161C"/>
                 </a:solidFill>
@@ -13848,7 +13837,7 @@
               <a:t> break</a:t>
             </a:r>
             <a:r>
-              <a:rPr lang="en-US" sz="2400" dirty="0" spc="-8" kern="0">
+              <a:rPr lang="en-US" sz="2550" dirty="0" spc="-11" kern="0">
                 <a:solidFill>
                   <a:srgbClr val="14161C"/>
                 </a:solidFill>
@@ -13859,7 +13848,7 @@
               <a:t> hay</a:t>
             </a:r>
             <a:r>
-              <a:rPr lang="en-US" sz="2400" dirty="0" spc="0" kern="0">
+              <a:rPr lang="en-US" sz="2550" dirty="0" spc="0" kern="0">
                 <a:solidFill>
                   <a:srgbClr val="14161C"/>
                 </a:solidFill>
@@ -13870,7 +13859,7 @@
               <a:t> biến</a:t>
             </a:r>
             <a:r>
-              <a:rPr lang="en-US" sz="2400" dirty="0" spc="-13" kern="0">
+              <a:rPr lang="en-US" sz="2550" dirty="0" spc="-17" kern="0">
                 <a:solidFill>
                   <a:srgbClr val="14161C"/>
                 </a:solidFill>
@@ -13881,7 +13870,7 @@
               <a:t> trong</a:t>
             </a:r>
             <a:r>
-              <a:rPr lang="en-US" sz="2400" dirty="0" spc="-16" kern="0">
+              <a:rPr lang="en-US" sz="2550" dirty="0" spc="-18" kern="0">
                 <a:solidFill>
                   <a:srgbClr val="14161C"/>
                 </a:solidFill>
@@ -13892,7 +13881,7 @@
               <a:t> proxy_pass</a:t>
             </a:r>
             <a:r>
-              <a:rPr lang="en-US" sz="2400" dirty="0" spc="3" kern="0">
+              <a:rPr lang="en-US" sz="2550" dirty="0" spc="1" kern="0">
                 <a:solidFill>
                   <a:srgbClr val="14161C"/>
                 </a:solidFill>
@@ -13903,7 +13892,7 @@
               <a:t> làm</a:t>
             </a:r>
             <a:r>
-              <a:rPr lang="en-US" sz="2400" dirty="0" spc="12" kern="0">
+              <a:rPr lang="en-US" sz="2550" dirty="0" spc="12" kern="0">
                 <a:solidFill>
                   <a:srgbClr val="14161C"/>
                 </a:solidFill>
@@ -13914,7 +13903,7 @@
               <a:t> đổi</a:t>
             </a:r>
             <a:r>
-              <a:rPr lang="en-US" sz="2400" dirty="0" spc="-33" kern="0">
+              <a:rPr lang="en-US" sz="2550" dirty="0" spc="-33" kern="0">
                 <a:solidFill>
                   <a:srgbClr val="14161C"/>
                 </a:solidFill>
@@ -13925,7 +13914,7 @@
               <a:t> kết</a:t>
             </a:r>
             <a:r>
-              <a:rPr lang="en-US" sz="2400" dirty="0" spc="1" kern="0">
+              <a:rPr lang="en-US" sz="2550" dirty="0" spc="3" kern="0">
                 <a:solidFill>
                   <a:srgbClr val="14161C"/>
                 </a:solidFill>
@@ -13935,7 +13924,7 @@
               </a:rPr>
               <a:t> quả.</a:t>
             </a:r>
-            <a:endParaRPr lang="en-US" sz="2400" dirty="0"/>
+            <a:endParaRPr lang="en-US" sz="2550" dirty="0"/>
           </a:p>
         </p:txBody>
       </p:sp>
@@ -14598,7 +14587,7 @@
               <a:buNone/>
             </a:pPr>
             <a:r>
-              <a:rPr lang="en-US" sz="2250" dirty="0" kern="0">
+              <a:rPr lang="en-US" sz="2550" dirty="0" spc="5" kern="0">
                 <a:solidFill>
                   <a:srgbClr val="1F3FD1"/>
                 </a:solidFill>
@@ -14608,7 +14597,7 @@
               </a:rPr>
               <a:t>Host</a:t>
             </a:r>
-            <a:endParaRPr lang="en-US" sz="2250" dirty="0"/>
+            <a:endParaRPr lang="en-US" sz="2550" dirty="0"/>
           </a:p>
         </p:txBody>
       </p:sp>
@@ -14637,7 +14626,7 @@
               <a:buNone/>
             </a:pPr>
             <a:r>
-              <a:rPr lang="en-US" sz="2250" dirty="0" spc="-2" kern="0">
+              <a:rPr lang="en-US" sz="2550" dirty="0" spc="1" kern="0">
                 <a:solidFill>
                   <a:srgbClr val="14161C"/>
                 </a:solidFill>
@@ -14648,7 +14637,7 @@
               <a:t>Mặc</a:t>
             </a:r>
             <a:r>
-              <a:rPr lang="en-US" sz="2250" dirty="0" spc="19" kern="0">
+              <a:rPr lang="en-US" sz="2550" dirty="0" spc="21" kern="0">
                 <a:solidFill>
                   <a:srgbClr val="14161C"/>
                 </a:solidFill>
@@ -14659,7 +14648,7 @@
               <a:t> định</a:t>
             </a:r>
             <a:r>
-              <a:rPr lang="en-US" sz="2250" dirty="0" spc="36" kern="0">
+              <a:rPr lang="en-US" sz="2550" dirty="0" spc="40" kern="0">
                 <a:solidFill>
                   <a:srgbClr val="14161C"/>
                 </a:solidFill>
@@ -14670,7 +14659,7 @@
               <a:t> gửi</a:t>
             </a:r>
             <a:r>
-              <a:rPr lang="en-US" sz="2250" dirty="0" spc="-14" kern="0">
+              <a:rPr lang="en-US" sz="2550" dirty="0" spc="-17" kern="0">
                 <a:solidFill>
                   <a:srgbClr val="14161C"/>
                 </a:solidFill>
@@ -14681,7 +14670,7 @@
               <a:t> $proxy_host;</a:t>
             </a:r>
             <a:r>
-              <a:rPr lang="en-US" sz="2250" dirty="0" spc="-1" kern="0">
+              <a:rPr lang="en-US" sz="2550" dirty="0" spc="0" kern="0">
                 <a:solidFill>
                   <a:srgbClr val="14161C"/>
                 </a:solidFill>
@@ -14692,7 +14681,7 @@
               <a:t> giữ</a:t>
             </a:r>
             <a:r>
-              <a:rPr lang="en-US" sz="2250" dirty="0" spc="-11" kern="0">
+              <a:rPr lang="en-US" sz="2550" dirty="0" spc="-12" kern="0">
                 <a:solidFill>
                   <a:srgbClr val="14161C"/>
                 </a:solidFill>
@@ -14703,7 +14692,7 @@
               <a:t> tên</a:t>
             </a:r>
             <a:r>
-              <a:rPr lang="en-US" sz="2250" dirty="0" spc="0" kern="0">
+              <a:rPr lang="en-US" sz="2550" dirty="0" spc="1" kern="0">
                 <a:solidFill>
                   <a:srgbClr val="14161C"/>
                 </a:solidFill>
@@ -14714,7 +14703,7 @@
               <a:t> miền:</a:t>
             </a:r>
             <a:r>
-              <a:rPr lang="en-US" sz="2250" dirty="0" spc="-4" kern="0">
+              <a:rPr lang="en-US" sz="2550" dirty="0" spc="-6" kern="0">
                 <a:solidFill>
                   <a:srgbClr val="14161C"/>
                 </a:solidFill>
@@ -14725,7 +14714,7 @@
               <a:t> Host</a:t>
             </a:r>
             <a:r>
-              <a:rPr lang="en-US" sz="2250" dirty="0" spc="-2" kern="0">
+              <a:rPr lang="en-US" sz="2550" dirty="0" spc="-4" kern="0">
                 <a:solidFill>
                   <a:srgbClr val="14161C"/>
                 </a:solidFill>
@@ -14735,7 +14724,7 @@
               </a:rPr>
               <a:t> $host.</a:t>
             </a:r>
-            <a:endParaRPr lang="en-US" sz="2250" dirty="0"/>
+            <a:endParaRPr lang="en-US" sz="2550" dirty="0"/>
           </a:p>
         </p:txBody>
       </p:sp>
@@ -14813,7 +14802,7 @@
               <a:buNone/>
             </a:pPr>
             <a:r>
-              <a:rPr lang="en-US" sz="2250" dirty="0" kern="0">
+              <a:rPr lang="en-US" sz="2550" dirty="0" spc="5" kern="0">
                 <a:solidFill>
                   <a:srgbClr val="1F3FD1"/>
                 </a:solidFill>
@@ -14823,7 +14812,7 @@
               </a:rPr>
               <a:t>X-Forwarded-For</a:t>
             </a:r>
-            <a:endParaRPr lang="en-US" sz="2250" dirty="0"/>
+            <a:endParaRPr lang="en-US" sz="2550" dirty="0"/>
           </a:p>
         </p:txBody>
       </p:sp>
@@ -14852,7 +14841,7 @@
               <a:buNone/>
             </a:pPr>
             <a:r>
-              <a:rPr lang="en-US" sz="2250" dirty="0" spc="-1" kern="0">
+              <a:rPr lang="en-US" sz="2550" dirty="0" spc="1" kern="0">
                 <a:solidFill>
                   <a:srgbClr val="14161C"/>
                 </a:solidFill>
@@ -14863,29 +14852,18 @@
               <a:t>Cổng</a:t>
             </a:r>
             <a:r>
-              <a:rPr lang="en-US" sz="2250" dirty="0" spc="3" kern="0">
-                <a:solidFill>
-                  <a:srgbClr val="14161C"/>
-                </a:solidFill>
-                <a:latin typeface="Be Vietnam Pro" pitchFamily="34" charset="0"/>
-                <a:ea typeface="Be Vietnam Pro" pitchFamily="34" charset="-122"/>
-                <a:cs typeface="Be Vietnam Pro" pitchFamily="34" charset="-120"/>
-              </a:rPr>
-              <a:t> công</a:t>
-            </a:r>
-            <a:r>
-              <a:rPr lang="en-US" sz="2250" dirty="0" spc="-1" kern="0">
-                <a:solidFill>
-                  <a:srgbClr val="14161C"/>
-                </a:solidFill>
-                <a:latin typeface="Be Vietnam Pro" pitchFamily="34" charset="0"/>
-                <a:ea typeface="Be Vietnam Pro" pitchFamily="34" charset="-122"/>
-                <a:cs typeface="Be Vietnam Pro" pitchFamily="34" charset="-120"/>
-              </a:rPr>
-              <a:t> khai: ghi</a:t>
-            </a:r>
-            <a:r>
-              <a:rPr lang="en-US" sz="2250" dirty="0" spc="16" kern="0">
+              <a:rPr lang="en-US" sz="2550" dirty="0" spc="0" kern="0">
+                <a:solidFill>
+                  <a:srgbClr val="14161C"/>
+                </a:solidFill>
+                <a:latin typeface="Be Vietnam Pro" pitchFamily="34" charset="0"/>
+                <a:ea typeface="Be Vietnam Pro" pitchFamily="34" charset="-122"/>
+                <a:cs typeface="Be Vietnam Pro" pitchFamily="34" charset="-120"/>
+              </a:rPr>
+              <a:t> công khai: ghi</a:t>
+            </a:r>
+            <a:r>
+              <a:rPr lang="en-US" sz="2550" dirty="0" spc="18" kern="0">
                 <a:solidFill>
                   <a:srgbClr val="14161C"/>
                 </a:solidFill>
@@ -14896,7 +14874,7 @@
               <a:t> đè</a:t>
             </a:r>
             <a:r>
-              <a:rPr lang="en-US" sz="2250" dirty="0" spc="-2" kern="0">
+              <a:rPr lang="en-US" sz="2550" dirty="0" spc="-2" kern="0">
                 <a:solidFill>
                   <a:srgbClr val="14161C"/>
                 </a:solidFill>
@@ -14907,7 +14885,7 @@
               <a:t> bằng</a:t>
             </a:r>
             <a:r>
-              <a:rPr lang="en-US" sz="2250" dirty="0" spc="-11" kern="0">
+              <a:rPr lang="en-US" sz="2550" dirty="0" spc="-12" kern="0">
                 <a:solidFill>
                   <a:srgbClr val="14161C"/>
                 </a:solidFill>
@@ -14917,7 +14895,7 @@
               </a:rPr>
               <a:t> $remote_addr.</a:t>
             </a:r>
-            <a:endParaRPr lang="en-US" sz="2250" dirty="0"/>
+            <a:endParaRPr lang="en-US" sz="2550" dirty="0"/>
           </a:p>
         </p:txBody>
       </p:sp>
@@ -14995,7 +14973,7 @@
               <a:buNone/>
             </a:pPr>
             <a:r>
-              <a:rPr lang="en-US" sz="2250" dirty="0" kern="0">
+              <a:rPr lang="en-US" sz="2550" dirty="0" spc="5" kern="0">
                 <a:solidFill>
                   <a:srgbClr val="1F3FD1"/>
                 </a:solidFill>
@@ -15005,7 +14983,7 @@
               </a:rPr>
               <a:t>$proxy_add_x_forwarded_for</a:t>
             </a:r>
-            <a:endParaRPr lang="en-US" sz="2250" dirty="0"/>
+            <a:endParaRPr lang="en-US" sz="2550" dirty="0"/>
           </a:p>
         </p:txBody>
       </p:sp>
@@ -15034,62 +15012,29 @@
               <a:buNone/>
             </a:pPr>
             <a:r>
-              <a:rPr lang="en-US" sz="2250" dirty="0" spc="-2" kern="0">
-                <a:solidFill>
-                  <a:srgbClr val="14161C"/>
-                </a:solidFill>
-                <a:latin typeface="Be Vietnam Pro" pitchFamily="34" charset="0"/>
-                <a:ea typeface="Be Vietnam Pro" pitchFamily="34" charset="-122"/>
-                <a:cs typeface="Be Vietnam Pro" pitchFamily="34" charset="-120"/>
-              </a:rPr>
-              <a:t>Nối</a:t>
-            </a:r>
-            <a:r>
-              <a:rPr lang="en-US" sz="2250" dirty="0" spc="-1" kern="0">
-                <a:solidFill>
-                  <a:srgbClr val="14161C"/>
-                </a:solidFill>
-                <a:latin typeface="Be Vietnam Pro" pitchFamily="34" charset="0"/>
-                <a:ea typeface="Be Vietnam Pro" pitchFamily="34" charset="-122"/>
-                <a:cs typeface="Be Vietnam Pro" pitchFamily="34" charset="-120"/>
-              </a:rPr>
-              <a:t> thêm;</a:t>
-            </a:r>
-            <a:r>
-              <a:rPr lang="en-US" sz="2250" dirty="0" spc="1" kern="0">
-                <a:solidFill>
-                  <a:srgbClr val="14161C"/>
-                </a:solidFill>
-                <a:latin typeface="Be Vietnam Pro" pitchFamily="34" charset="0"/>
-                <a:ea typeface="Be Vietnam Pro" pitchFamily="34" charset="-122"/>
-                <a:cs typeface="Be Vietnam Pro" pitchFamily="34" charset="-120"/>
-              </a:rPr>
-              <a:t> chỉ</a:t>
-            </a:r>
-            <a:r>
-              <a:rPr lang="en-US" sz="2250" dirty="0" spc="-1" kern="0">
-                <a:solidFill>
-                  <a:srgbClr val="14161C"/>
-                </a:solidFill>
-                <a:latin typeface="Be Vietnam Pro" pitchFamily="34" charset="0"/>
-                <a:ea typeface="Be Vietnam Pro" pitchFamily="34" charset="-122"/>
-                <a:cs typeface="Be Vietnam Pro" pitchFamily="34" charset="-120"/>
-              </a:rPr>
-              <a:t> khi</a:t>
-            </a:r>
-            <a:r>
-              <a:rPr lang="en-US" sz="2250" dirty="0" spc="0" kern="0">
-                <a:solidFill>
-                  <a:srgbClr val="14161C"/>
-                </a:solidFill>
-                <a:latin typeface="Be Vietnam Pro" pitchFamily="34" charset="0"/>
-                <a:ea typeface="Be Vietnam Pro" pitchFamily="34" charset="-122"/>
-                <a:cs typeface="Be Vietnam Pro" pitchFamily="34" charset="-120"/>
-              </a:rPr>
-              <a:t> phía</a:t>
-            </a:r>
-            <a:r>
-              <a:rPr lang="en-US" sz="2250" dirty="0" spc="6" kern="0">
+              <a:rPr lang="en-US" sz="2550" dirty="0" spc="1" kern="0">
+                <a:solidFill>
+                  <a:srgbClr val="14161C"/>
+                </a:solidFill>
+                <a:latin typeface="Be Vietnam Pro" pitchFamily="34" charset="0"/>
+                <a:ea typeface="Be Vietnam Pro" pitchFamily="34" charset="-122"/>
+                <a:cs typeface="Be Vietnam Pro" pitchFamily="34" charset="-120"/>
+              </a:rPr>
+              <a:t>Nối thêm;</a:t>
+            </a:r>
+            <a:r>
+              <a:rPr lang="en-US" sz="2550" dirty="0" spc="0" kern="0">
+                <a:solidFill>
+                  <a:srgbClr val="14161C"/>
+                </a:solidFill>
+                <a:latin typeface="Be Vietnam Pro" pitchFamily="34" charset="0"/>
+                <a:ea typeface="Be Vietnam Pro" pitchFamily="34" charset="-122"/>
+                <a:cs typeface="Be Vietnam Pro" pitchFamily="34" charset="-120"/>
+              </a:rPr>
+              <a:t> chỉ khi phía</a:t>
+            </a:r>
+            <a:r>
+              <a:rPr lang="en-US" sz="2550" dirty="0" spc="6" kern="0">
                 <a:solidFill>
                   <a:srgbClr val="14161C"/>
                 </a:solidFill>
@@ -15100,7 +15045,7 @@
               <a:t> trước</a:t>
             </a:r>
             <a:r>
-              <a:rPr lang="en-US" sz="2250" dirty="0" spc="5" kern="0">
+              <a:rPr lang="en-US" sz="2550" dirty="0" spc="0" kern="0">
                 <a:solidFill>
                   <a:srgbClr val="14161C"/>
                 </a:solidFill>
@@ -15111,7 +15056,7 @@
               <a:t> có</a:t>
             </a:r>
             <a:r>
-              <a:rPr lang="en-US" sz="2250" dirty="0" spc="-27" kern="0">
+              <a:rPr lang="en-US" sz="2550" dirty="0" spc="-30" kern="0">
                 <a:solidFill>
                   <a:srgbClr val="14161C"/>
                 </a:solidFill>
@@ -15122,7 +15067,7 @@
               <a:t> proxy</a:t>
             </a:r>
             <a:r>
-              <a:rPr lang="en-US" sz="2250" dirty="0" spc="0" kern="0">
+              <a:rPr lang="en-US" sz="2550" dirty="0" spc="0" kern="0">
                 <a:solidFill>
                   <a:srgbClr val="14161C"/>
                 </a:solidFill>
@@ -15133,7 +15078,7 @@
               <a:t> tin</a:t>
             </a:r>
             <a:r>
-              <a:rPr lang="en-US" sz="2250" dirty="0" spc="-5" kern="0">
+              <a:rPr lang="en-US" sz="2550" dirty="0" spc="-7" kern="0">
                 <a:solidFill>
                   <a:srgbClr val="14161C"/>
                 </a:solidFill>
@@ -15143,7 +15088,7 @@
               </a:rPr>
               <a:t> cậy.</a:t>
             </a:r>
-            <a:endParaRPr lang="en-US" sz="2250" dirty="0"/>
+            <a:endParaRPr lang="en-US" sz="2550" dirty="0"/>
           </a:p>
         </p:txBody>
       </p:sp>
@@ -15221,7 +15166,7 @@
               <a:buNone/>
             </a:pPr>
             <a:r>
-              <a:rPr lang="en-US" sz="2250" dirty="0" kern="0">
+              <a:rPr lang="en-US" sz="2550" dirty="0" spc="5" kern="0">
                 <a:solidFill>
                   <a:srgbClr val="B45309"/>
                 </a:solidFill>
@@ -15231,7 +15176,7 @@
               </a:rPr>
               <a:t>proxy_connect_timeout</a:t>
             </a:r>
-            <a:endParaRPr lang="en-US" sz="2250" dirty="0"/>
+            <a:endParaRPr lang="en-US" sz="2550" dirty="0"/>
           </a:p>
         </p:txBody>
       </p:sp>
@@ -15260,7 +15205,7 @@
               <a:buNone/>
             </a:pPr>
             <a:r>
-              <a:rPr lang="en-US" sz="2250" dirty="0" spc="11" kern="0">
+              <a:rPr lang="en-US" sz="2550" dirty="0" spc="10" kern="0">
                 <a:solidFill>
                   <a:srgbClr val="14161C"/>
                 </a:solidFill>
@@ -15271,7 +15216,7 @@
               <a:t>Bước</a:t>
             </a:r>
             <a:r>
-              <a:rPr lang="en-US" sz="2250" dirty="0" spc="0" kern="0">
+              <a:rPr lang="en-US" sz="2550" dirty="0" spc="-1" kern="0">
                 <a:solidFill>
                   <a:srgbClr val="14161C"/>
                 </a:solidFill>
@@ -15282,7 +15227,7 @@
               <a:t> nối;</a:t>
             </a:r>
             <a:r>
-              <a:rPr lang="en-US" sz="2250" dirty="0" spc="5" kern="0">
+              <a:rPr lang="en-US" sz="2550" dirty="0" spc="5" kern="0">
                 <a:solidFill>
                   <a:srgbClr val="14161C"/>
                 </a:solidFill>
@@ -15293,7 +15238,7 @@
               <a:t> thường</a:t>
             </a:r>
             <a:r>
-              <a:rPr lang="en-US" sz="2250" dirty="0" spc="1" kern="0">
+              <a:rPr lang="en-US" sz="2550" dirty="0" spc="0" kern="0">
                 <a:solidFill>
                   <a:srgbClr val="14161C"/>
                 </a:solidFill>
@@ -15304,7 +15249,7 @@
               <a:t> không</a:t>
             </a:r>
             <a:r>
-              <a:rPr lang="en-US" sz="2250" dirty="0" spc="7" kern="0">
+              <a:rPr lang="en-US" sz="2550" dirty="0" spc="6" kern="0">
                 <a:solidFill>
                   <a:srgbClr val="14161C"/>
                 </a:solidFill>
@@ -15315,7 +15260,7 @@
               <a:t> vượt</a:t>
             </a:r>
             <a:r>
-              <a:rPr lang="en-US" sz="2250" dirty="0" spc="1" kern="0">
+              <a:rPr lang="en-US" sz="2550" dirty="0" spc="1" kern="0">
                 <a:solidFill>
                   <a:srgbClr val="14161C"/>
                 </a:solidFill>
@@ -15326,7 +15271,7 @@
               <a:t> quá</a:t>
             </a:r>
             <a:r>
-              <a:rPr lang="en-US" sz="2250" dirty="0" spc="0" kern="0">
+              <a:rPr lang="en-US" sz="2550" dirty="0" spc="-1" kern="0">
                 <a:solidFill>
                   <a:srgbClr val="14161C"/>
                 </a:solidFill>
@@ -15337,7 +15282,7 @@
               <a:t> 75</a:t>
             </a:r>
             <a:r>
-              <a:rPr lang="en-US" sz="2250" dirty="0" spc="-6" kern="0">
+              <a:rPr lang="en-US" sz="2550" dirty="0" spc="-5" kern="0">
                 <a:solidFill>
                   <a:srgbClr val="14161C"/>
                 </a:solidFill>
@@ -15347,7 +15292,7 @@
               </a:rPr>
               <a:t> giây.</a:t>
             </a:r>
-            <a:endParaRPr lang="en-US" sz="2250" dirty="0"/>
+            <a:endParaRPr lang="en-US" sz="2550" dirty="0"/>
           </a:p>
         </p:txBody>
       </p:sp>
@@ -15425,7 +15370,7 @@
               <a:buNone/>
             </a:pPr>
             <a:r>
-              <a:rPr lang="en-US" sz="2250" dirty="0" kern="0">
+              <a:rPr lang="en-US" sz="2550" dirty="0" spc="5" kern="0">
                 <a:solidFill>
                   <a:srgbClr val="E8472B"/>
                 </a:solidFill>
@@ -15435,7 +15380,7 @@
               </a:rPr>
               <a:t>nginx -s reload</a:t>
             </a:r>
-            <a:endParaRPr lang="en-US" sz="2250" dirty="0"/>
+            <a:endParaRPr lang="en-US" sz="2550" dirty="0"/>
           </a:p>
         </p:txBody>
       </p:sp>
@@ -15464,7 +15409,7 @@
               <a:buNone/>
             </a:pPr>
             <a:r>
-              <a:rPr lang="en-US" sz="2250" dirty="0" spc="-37" kern="0">
+              <a:rPr lang="en-US" sz="2550" dirty="0" spc="-38" kern="0">
                 <a:solidFill>
                   <a:srgbClr val="14161C"/>
                 </a:solidFill>
@@ -15475,7 +15420,7 @@
               <a:t>Worker</a:t>
             </a:r>
             <a:r>
-              <a:rPr lang="en-US" sz="2250" dirty="0" spc="4" kern="0">
+              <a:rPr lang="en-US" sz="2550" dirty="0" spc="-1" kern="0">
                 <a:solidFill>
                   <a:srgbClr val="14161C"/>
                 </a:solidFill>
@@ -15486,7 +15431,7 @@
               <a:t> cũ</a:t>
             </a:r>
             <a:r>
-              <a:rPr lang="en-US" sz="2250" dirty="0" spc="2" kern="0">
+              <a:rPr lang="en-US" sz="2550" dirty="0" spc="-2" kern="0">
                 <a:solidFill>
                   <a:srgbClr val="14161C"/>
                 </a:solidFill>
@@ -15497,7 +15442,7 @@
               <a:t> xử</a:t>
             </a:r>
             <a:r>
-              <a:rPr lang="en-US" sz="2250" dirty="0" spc="1" kern="0">
+              <a:rPr lang="en-US" sz="2550" dirty="0" spc="-1" kern="0">
                 <a:solidFill>
                   <a:srgbClr val="14161C"/>
                 </a:solidFill>
@@ -15508,7 +15453,7 @@
               <a:t> lý</a:t>
             </a:r>
             <a:r>
-              <a:rPr lang="en-US" sz="2250" dirty="0" spc="-3" kern="0">
+              <a:rPr lang="en-US" sz="2550" dirty="0" spc="-6" kern="0">
                 <a:solidFill>
                   <a:srgbClr val="14161C"/>
                 </a:solidFill>
@@ -15519,7 +15464,7 @@
               <a:t> nốt</a:t>
             </a:r>
             <a:r>
-              <a:rPr lang="en-US" sz="2250" dirty="0" spc="-31" kern="0">
+              <a:rPr lang="en-US" sz="2550" dirty="0" spc="-33" kern="0">
                 <a:solidFill>
                   <a:srgbClr val="14161C"/>
                 </a:solidFill>
@@ -15530,7 +15475,7 @@
               <a:t> kết</a:t>
             </a:r>
             <a:r>
-              <a:rPr lang="en-US" sz="2250" dirty="0" spc="1" kern="0">
+              <a:rPr lang="en-US" sz="2550" dirty="0" spc="-1" kern="0">
                 <a:solidFill>
                   <a:srgbClr val="14161C"/>
                 </a:solidFill>
@@ -15541,7 +15486,7 @@
               <a:t> nối</a:t>
             </a:r>
             <a:r>
-              <a:rPr lang="en-US" sz="2250" dirty="0" spc="-23" kern="0">
+              <a:rPr lang="en-US" sz="2550" dirty="0" spc="-26" kern="0">
                 <a:solidFill>
                   <a:srgbClr val="14161C"/>
                 </a:solidFill>
@@ -15552,7 +15497,7 @@
               <a:t> rồi</a:t>
             </a:r>
             <a:r>
-              <a:rPr lang="en-US" sz="2250" dirty="0" spc="-8" kern="0">
+              <a:rPr lang="en-US" sz="2550" dirty="0" spc="-7" kern="0">
                 <a:solidFill>
                   <a:srgbClr val="14161C"/>
                 </a:solidFill>
@@ -15562,7 +15507,7 @@
               </a:rPr>
               <a:t> thoát.</a:t>
             </a:r>
-            <a:endParaRPr lang="en-US" sz="2250" dirty="0"/>
+            <a:endParaRPr lang="en-US" sz="2550" dirty="0"/>
           </a:p>
         </p:txBody>
       </p:sp>

--- a/system-design-101/vi/lessons/sd-13-024/slides/sd-13-024.pptx
+++ b/system-design-101/vi/lessons/sd-13-024/slides/sd-13-024.pptx
@@ -4970,7 +4970,7 @@
               <a:t> sai</a:t>
             </a:r>
             <a:r>
-              <a:rPr lang="en-US" sz="7800" dirty="0" spc="-2" kern="0">
+              <a:rPr lang="en-US" sz="7800" dirty="0" spc="-15" kern="0">
                 <a:solidFill>
                   <a:srgbClr val="14161C"/>
                 </a:solidFill>
@@ -4978,10 +4978,10 @@
                 <a:ea typeface="Bricolage Grotesque ExtraBold" pitchFamily="34" charset="-122"/>
                 <a:cs typeface="Bricolage Grotesque ExtraBold" pitchFamily="34" charset="-120"/>
               </a:rPr>
-              <a:t> là</a:t>
-            </a:r>
-            <a:r>
-              <a:rPr lang="en-US" sz="7800" dirty="0" spc="-15" kern="0">
+              <a:t> một</a:t>
+            </a:r>
+            <a:r>
+              <a:rPr lang="en-US" sz="7800" dirty="0" spc="-9" kern="0">
                 <a:solidFill>
                   <a:srgbClr val="14161C"/>
                 </a:solidFill>
@@ -4989,10 +4989,10 @@
                 <a:ea typeface="Bricolage Grotesque ExtraBold" pitchFamily="34" charset="-122"/>
                 <a:cs typeface="Bricolage Grotesque ExtraBold" pitchFamily="34" charset="-120"/>
               </a:rPr>
-              <a:t> một</a:t>
-            </a:r>
-            <a:r>
-              <a:rPr lang="en-US" sz="7800" dirty="0" spc="-3" kern="0">
+              <a:t> thẻ,</a:t>
+            </a:r>
+            <a:r>
+              <a:rPr lang="en-US" sz="7800" dirty="0" spc="-4" kern="0">
                 <a:solidFill>
                   <a:srgbClr val="14161C"/>
                 </a:solidFill>
@@ -5000,10 +5000,10 @@
                 <a:ea typeface="Bricolage Grotesque ExtraBold" pitchFamily="34" charset="-122"/>
                 <a:cs typeface="Bricolage Grotesque ExtraBold" pitchFamily="34" charset="-120"/>
               </a:rPr>
-              <a:t> thẻ</a:t>
-            </a:r>
-            <a:r>
-              <a:rPr lang="en-US" sz="7800" dirty="0" spc="20" kern="0">
+              <a:t> không</a:t>
+            </a:r>
+            <a:r>
+              <a:rPr lang="en-US" sz="7800" dirty="0" spc="-3" kern="0">
                 <a:solidFill>
                   <a:srgbClr val="14161C"/>
                 </a:solidFill>
@@ -5011,10 +5011,10 @@
                 <a:ea typeface="Bricolage Grotesque ExtraBold" pitchFamily="34" charset="-122"/>
                 <a:cs typeface="Bricolage Grotesque ExtraBold" pitchFamily="34" charset="-120"/>
               </a:rPr>
-              <a:t> riêng,</a:t>
-            </a:r>
-            <a:r>
-              <a:rPr lang="en-US" sz="7800" dirty="0" spc="-4" kern="0">
+              <a:t> theo</a:t>
+            </a:r>
+            <a:r>
+              <a:rPr lang="en-US" sz="7800" dirty="0" spc="-2" kern="0">
                 <a:solidFill>
                   <a:srgbClr val="14161C"/>
                 </a:solidFill>
@@ -5022,18 +5022,7 @@
                 <a:ea typeface="Bricolage Grotesque ExtraBold" pitchFamily="34" charset="-122"/>
                 <a:cs typeface="Bricolage Grotesque ExtraBold" pitchFamily="34" charset="-120"/>
               </a:rPr>
-              <a:t> không</a:t>
-            </a:r>
-            <a:r>
-              <a:rPr lang="en-US" sz="7800" dirty="0" spc="-2" kern="0">
-                <a:solidFill>
-                  <a:srgbClr val="14161C"/>
-                </a:solidFill>
-                <a:latin typeface="Bricolage Grotesque ExtraBold" pitchFamily="34" charset="0"/>
-                <a:ea typeface="Bricolage Grotesque ExtraBold" pitchFamily="34" charset="-122"/>
-                <a:cs typeface="Bricolage Grotesque ExtraBold" pitchFamily="34" charset="-120"/>
-              </a:rPr>
-              <a:t> theo thứ</a:t>
+              <a:t> thứ</a:t>
             </a:r>
             <a:r>
               <a:rPr lang="en-US" sz="7800" dirty="0" spc="-57" kern="0">
@@ -8067,6 +8056,17 @@
               <a:buChar char="•"/>
             </a:pPr>
             <a:r>
+              <a:rPr lang="en-US" sz="2550" dirty="0" spc="0" kern="0">
+                <a:solidFill>
+                  <a:srgbClr val="F3EEE3"/>
+                </a:solidFill>
+                <a:latin typeface="Be Vietnam Pro" pitchFamily="34" charset="0"/>
+                <a:ea typeface="Be Vietnam Pro" pitchFamily="34" charset="-122"/>
+                <a:cs typeface="Be Vietnam Pro" pitchFamily="34" charset="-120"/>
+              </a:rPr>
+              <a:t>Sau</a:t>
+            </a:r>
+            <a:r>
               <a:rPr lang="en-US" sz="2550" dirty="0" spc="-2" kern="0">
                 <a:solidFill>
                   <a:srgbClr val="F3EEE3"/>
@@ -8075,10 +8075,10 @@
                 <a:ea typeface="Be Vietnam Pro" pitchFamily="34" charset="-122"/>
                 <a:cs typeface="Be Vietnam Pro" pitchFamily="34" charset="-120"/>
               </a:rPr>
-              <a:t>Header</a:t>
-            </a:r>
-            <a:r>
-              <a:rPr lang="en-US" sz="2550" dirty="0" spc="17" kern="0">
+              <a:t> header,</a:t>
+            </a:r>
+            <a:r>
+              <a:rPr lang="en-US" sz="2550" dirty="0" spc="-15" kern="0">
                 <a:solidFill>
                   <a:srgbClr val="F3EEE3"/>
                 </a:solidFill>
@@ -8086,43 +8086,10 @@
                 <a:ea typeface="Be Vietnam Pro" pitchFamily="34" charset="-122"/>
                 <a:cs typeface="Be Vietnam Pro" pitchFamily="34" charset="-120"/>
               </a:rPr>
-              <a:t> đã</a:t>
-            </a:r>
-            <a:r>
-              <a:rPr lang="en-US" sz="2550" dirty="0" spc="-12" kern="0">
-                <a:solidFill>
-                  <a:srgbClr val="F3EEE3"/>
-                </a:solidFill>
-                <a:latin typeface="Be Vietnam Pro" pitchFamily="34" charset="0"/>
-                <a:ea typeface="Be Vietnam Pro" pitchFamily="34" charset="-122"/>
-                <a:cs typeface="Be Vietnam Pro" pitchFamily="34" charset="-120"/>
-              </a:rPr>
-              <a:t> tới</a:t>
-            </a:r>
-            <a:r>
-              <a:rPr lang="en-US" sz="2550" dirty="0" spc="-6" kern="0">
-                <a:solidFill>
-                  <a:srgbClr val="F3EEE3"/>
-                </a:solidFill>
-                <a:latin typeface="Be Vietnam Pro" pitchFamily="34" charset="0"/>
-                <a:ea typeface="Be Vietnam Pro" pitchFamily="34" charset="-122"/>
-                <a:cs typeface="Be Vietnam Pro" pitchFamily="34" charset="-120"/>
-              </a:rPr>
-              <a:t> client,</a:t>
-            </a:r>
-            <a:r>
-              <a:rPr lang="en-US" sz="2550" dirty="0" spc="-16" kern="0">
-                <a:solidFill>
-                  <a:srgbClr val="F3EEE3"/>
-                </a:solidFill>
-                <a:latin typeface="Be Vietnam Pro" pitchFamily="34" charset="0"/>
-                <a:ea typeface="Be Vietnam Pro" pitchFamily="34" charset="-122"/>
-                <a:cs typeface="Be Vietnam Pro" pitchFamily="34" charset="-120"/>
-              </a:rPr>
               <a:t> backend</a:t>
             </a:r>
             <a:r>
-              <a:rPr lang="en-US" sz="2550" dirty="0" spc="0" kern="0">
+              <a:rPr lang="en-US" sz="2550" dirty="0" spc="-1" kern="0">
                 <a:solidFill>
                   <a:srgbClr val="F3EEE3"/>
                 </a:solidFill>
@@ -13166,8 +13133,17 @@
               </a:rPr>
               <a:t> cuối.</a:t>
             </a:r>
-            <a:r>
-              <a:rPr lang="en-US" sz="2700" b="1" dirty="0" spc="-22" kern="0">
+            <a:endParaRPr lang="en-US" sz="2700" dirty="0"/>
+          </a:p>
+          <a:p>
+            <a:pPr algn="l" indent="0" marL="0">
+              <a:lnSpc>
+                <a:spcPts val="3645"/>
+              </a:lnSpc>
+              <a:buNone/>
+            </a:pPr>
+            <a:r>
+              <a:rPr lang="en-US" sz="2700" b="1" dirty="0" spc="-24" kern="0">
                 <a:solidFill>
                   <a:srgbClr val="6B6A66"/>
                 </a:solidFill>
@@ -13175,10 +13151,10 @@
                 <a:ea typeface="Be Vietnam Pro" pitchFamily="34" charset="-122"/>
                 <a:cs typeface="Be Vietnam Pro" pitchFamily="34" charset="-120"/>
               </a:rPr>
-              <a:t> Request</a:t>
-            </a:r>
-            <a:r>
-              <a:rPr lang="en-US" sz="2700" b="1" dirty="0" spc="0" kern="0">
+              <a:t>Request</a:t>
+            </a:r>
+            <a:r>
+              <a:rPr lang="en-US" sz="2700" b="1" dirty="0" spc="-1" kern="0">
                 <a:solidFill>
                   <a:srgbClr val="6B6A66"/>
                 </a:solidFill>
@@ -13879,17 +13855,6 @@
                 <a:cs typeface="Be Vietnam Pro" pitchFamily="34" charset="-120"/>
               </a:rPr>
               <a:t> proxy_pass</a:t>
-            </a:r>
-            <a:r>
-              <a:rPr lang="en-US" sz="2550" dirty="0" spc="1" kern="0">
-                <a:solidFill>
-                  <a:srgbClr val="14161C"/>
-                </a:solidFill>
-                <a:latin typeface="Be Vietnam Pro" pitchFamily="34" charset="0"/>
-                <a:ea typeface="Be Vietnam Pro" pitchFamily="34" charset="-122"/>
-                <a:cs typeface="Be Vietnam Pro" pitchFamily="34" charset="-120"/>
-              </a:rPr>
-              <a:t> làm</a:t>
             </a:r>
             <a:r>
               <a:rPr lang="en-US" sz="2550" dirty="0" spc="12" kern="0">

--- a/system-design-101/vi/lessons/sd-13-024/slides/sd-13-024.pptx
+++ b/system-design-101/vi/lessons/sd-13-024/slides/sd-13-024.pptx
@@ -32,12 +32,8 @@
       <p:regular r:id="rId18"/>
     </p:embeddedFont>
     <p:embeddedFont>
-      <p:font typeface="JetBrains Mono"/>
-      <p:bold r:id="rId20"/>
-    </p:embeddedFont>
-    <p:embeddedFont>
-      <p:font typeface="JetBrains Mono ExtraBold"/>
-      <p:regular r:id="rId21"/>
+      <p:font typeface="Be Vietnam Pro ExtraBold"/>
+      <p:regular r:id="rId20"/>
     </p:embeddedFont>
   </p:embeddedFontLst>
   <p:defaultTextStyle>
@@ -5068,7 +5064,7 @@
               <a:buNone/>
             </a:pPr>
             <a:r>
-              <a:rPr lang="en-US" sz="2250" b="1" dirty="0" spc="5" kern="0">
+              <a:rPr lang="en-US" sz="2550" b="1" dirty="0" spc="9" kern="0">
                 <a:solidFill>
                   <a:srgbClr val="14161C"/>
                 </a:solidFill>
@@ -5079,7 +5075,7 @@
               <a:t>Đường</a:t>
             </a:r>
             <a:r>
-              <a:rPr lang="en-US" sz="2250" b="1" dirty="0" spc="0" kern="0">
+              <a:rPr lang="en-US" sz="2550" b="1" dirty="0" spc="-1" kern="0">
                 <a:solidFill>
                   <a:srgbClr val="14161C"/>
                 </a:solidFill>
@@ -5089,7 +5085,7 @@
               </a:rPr>
               <a:t> dẫn</a:t>
             </a:r>
-            <a:endParaRPr lang="en-US" sz="2250" dirty="0"/>
+            <a:endParaRPr lang="en-US" sz="2550" dirty="0"/>
           </a:p>
         </p:txBody>
       </p:sp>
@@ -5122,18 +5118,29 @@
               <a:buNone/>
             </a:pPr>
             <a:r>
-              <a:rPr lang="en-US" sz="2250" b="1" dirty="0" spc="4" kern="0">
-                <a:solidFill>
-                  <a:srgbClr val="14161C"/>
-                </a:solidFill>
-                <a:latin typeface="Be Vietnam Pro" pitchFamily="34" charset="0"/>
-                <a:ea typeface="Be Vietnam Pro" pitchFamily="34" charset="-122"/>
-                <a:cs typeface="Be Vietnam Pro" pitchFamily="34" charset="-120"/>
-              </a:rPr>
-              <a:t>Địa chỉ</a:t>
-            </a:r>
-            <a:r>
-              <a:rPr lang="en-US" sz="2250" b="1" dirty="0" spc="-4" kern="0">
+              <a:rPr lang="en-US" sz="2550" b="1" dirty="0" spc="-1" kern="0">
+                <a:solidFill>
+                  <a:srgbClr val="14161C"/>
+                </a:solidFill>
+                <a:latin typeface="Be Vietnam Pro" pitchFamily="34" charset="0"/>
+                <a:ea typeface="Be Vietnam Pro" pitchFamily="34" charset="-122"/>
+                <a:cs typeface="Be Vietnam Pro" pitchFamily="34" charset="-120"/>
+              </a:rPr>
+              <a:t>Địa</a:t>
+            </a:r>
+            <a:r>
+              <a:rPr lang="en-US" sz="2550" b="1" dirty="0" spc="0" kern="0">
+                <a:solidFill>
+                  <a:srgbClr val="14161C"/>
+                </a:solidFill>
+                <a:latin typeface="Be Vietnam Pro" pitchFamily="34" charset="0"/>
+                <a:ea typeface="Be Vietnam Pro" pitchFamily="34" charset="-122"/>
+                <a:cs typeface="Be Vietnam Pro" pitchFamily="34" charset="-120"/>
+              </a:rPr>
+              <a:t> chỉ</a:t>
+            </a:r>
+            <a:r>
+              <a:rPr lang="en-US" sz="2550" b="1" dirty="0" spc="-4" kern="0">
                 <a:solidFill>
                   <a:srgbClr val="14161C"/>
                 </a:solidFill>
@@ -5143,7 +5150,7 @@
               </a:rPr>
               <a:t> client</a:t>
             </a:r>
-            <a:endParaRPr lang="en-US" sz="2250" dirty="0"/>
+            <a:endParaRPr lang="en-US" sz="2550" dirty="0"/>
           </a:p>
         </p:txBody>
       </p:sp>
@@ -5176,7 +5183,7 @@
               <a:buNone/>
             </a:pPr>
             <a:r>
-              <a:rPr lang="en-US" sz="2250" b="1" dirty="0" spc="-1" kern="0">
+              <a:rPr lang="en-US" sz="2550" b="1" dirty="0" spc="-3" kern="0">
                 <a:solidFill>
                   <a:srgbClr val="14161C"/>
                 </a:solidFill>
@@ -5186,7 +5193,7 @@
               </a:rPr>
               <a:t>Timeout</a:t>
             </a:r>
-            <a:endParaRPr lang="en-US" sz="2250" dirty="0"/>
+            <a:endParaRPr lang="en-US" sz="2550" dirty="0"/>
           </a:p>
         </p:txBody>
       </p:sp>
@@ -5219,7 +5226,7 @@
               <a:buNone/>
             </a:pPr>
             <a:r>
-              <a:rPr lang="en-US" sz="2250" b="1" dirty="0" spc="-41" kern="0">
+              <a:rPr lang="en-US" sz="2550" b="1" dirty="0" spc="-44" kern="0">
                 <a:solidFill>
                   <a:srgbClr val="14161C"/>
                 </a:solidFill>
@@ -5230,7 +5237,7 @@
               <a:t>Kết</a:t>
             </a:r>
             <a:r>
-              <a:rPr lang="en-US" sz="2250" b="1" dirty="0" spc="-1" kern="0">
+              <a:rPr lang="en-US" sz="2550" b="1" dirty="0" spc="-2" kern="0">
                 <a:solidFill>
                   <a:srgbClr val="14161C"/>
                 </a:solidFill>
@@ -5241,7 +5248,7 @@
               <a:t> nối</a:t>
             </a:r>
             <a:r>
-              <a:rPr lang="en-US" sz="2250" b="1" dirty="0" spc="4" kern="0">
+              <a:rPr lang="en-US" sz="2550" b="1" dirty="0" spc="3" kern="0">
                 <a:solidFill>
                   <a:srgbClr val="14161C"/>
                 </a:solidFill>
@@ -5252,7 +5259,7 @@
               <a:t> tới</a:t>
             </a:r>
             <a:r>
-              <a:rPr lang="en-US" sz="2250" b="1" dirty="0" spc="-12" kern="0">
+              <a:rPr lang="en-US" sz="2550" b="1" dirty="0" spc="-14" kern="0">
                 <a:solidFill>
                   <a:srgbClr val="14161C"/>
                 </a:solidFill>
@@ -5262,7 +5269,7 @@
               </a:rPr>
               <a:t> backend</a:t>
             </a:r>
-            <a:endParaRPr lang="en-US" sz="2250" dirty="0"/>
+            <a:endParaRPr lang="en-US" sz="2550" dirty="0"/>
           </a:p>
         </p:txBody>
       </p:sp>
@@ -5295,29 +5302,18 @@
               <a:buNone/>
             </a:pPr>
             <a:r>
-              <a:rPr lang="en-US" sz="2250" b="1" dirty="0" spc="4" kern="0">
-                <a:solidFill>
-                  <a:srgbClr val="14161C"/>
-                </a:solidFill>
-                <a:latin typeface="Be Vietnam Pro" pitchFamily="34" charset="0"/>
-                <a:ea typeface="Be Vietnam Pro" pitchFamily="34" charset="-122"/>
-                <a:cs typeface="Be Vietnam Pro" pitchFamily="34" charset="-120"/>
-              </a:rPr>
-              <a:t>Đổi</a:t>
-            </a:r>
-            <a:r>
-              <a:rPr lang="en-US" sz="2250" b="1" dirty="0" spc="2" kern="0">
-                <a:solidFill>
-                  <a:srgbClr val="14161C"/>
-                </a:solidFill>
-                <a:latin typeface="Be Vietnam Pro" pitchFamily="34" charset="0"/>
-                <a:ea typeface="Be Vietnam Pro" pitchFamily="34" charset="-122"/>
-                <a:cs typeface="Be Vietnam Pro" pitchFamily="34" charset="-120"/>
-              </a:rPr>
-              <a:t> cấu</a:t>
-            </a:r>
-            <a:r>
-              <a:rPr lang="en-US" sz="2250" b="1" dirty="0" spc="3" kern="0">
+              <a:rPr lang="en-US" sz="2550" b="1" dirty="0" spc="2" kern="0">
+                <a:solidFill>
+                  <a:srgbClr val="14161C"/>
+                </a:solidFill>
+                <a:latin typeface="Be Vietnam Pro" pitchFamily="34" charset="0"/>
+                <a:ea typeface="Be Vietnam Pro" pitchFamily="34" charset="-122"/>
+                <a:cs typeface="Be Vietnam Pro" pitchFamily="34" charset="-120"/>
+              </a:rPr>
+              <a:t>Đổi cấu</a:t>
+            </a:r>
+            <a:r>
+              <a:rPr lang="en-US" sz="2550" b="1" dirty="0" spc="-1" kern="0">
                 <a:solidFill>
                   <a:srgbClr val="14161C"/>
                 </a:solidFill>
@@ -5327,7 +5323,7 @@
               </a:rPr>
               <a:t> hình</a:t>
             </a:r>
-            <a:endParaRPr lang="en-US" sz="2250" dirty="0"/>
+            <a:endParaRPr lang="en-US" sz="2550" dirty="0"/>
           </a:p>
         </p:txBody>
       </p:sp>
@@ -6021,7 +6017,7 @@
               <a:buNone/>
             </a:pPr>
             <a:r>
-              <a:rPr lang="en-US" sz="2400" b="1" dirty="0" spc="-7" kern="0">
+              <a:rPr lang="en-US" sz="2550" b="1" dirty="0" spc="-5" kern="0">
                 <a:solidFill>
                   <a:srgbClr val="F3EEE3"/>
                 </a:solidFill>
@@ -6031,7 +6027,7 @@
               </a:rPr>
               <a:t>Client</a:t>
             </a:r>
-            <a:endParaRPr lang="en-US" sz="2400" dirty="0"/>
+            <a:endParaRPr lang="en-US" sz="2550" dirty="0"/>
           </a:p>
         </p:txBody>
       </p:sp>
@@ -6089,7 +6085,7 @@
               <a:buNone/>
             </a:pPr>
             <a:r>
-              <a:rPr lang="en-US" sz="2400" b="1" dirty="0" spc="-6" kern="0">
+              <a:rPr lang="en-US" sz="2550" b="1" dirty="0" spc="-1" kern="0">
                 <a:solidFill>
                   <a:srgbClr val="14161C"/>
                 </a:solidFill>
@@ -6099,7 +6095,7 @@
               </a:rPr>
               <a:t>Nginx</a:t>
             </a:r>
-            <a:endParaRPr lang="en-US" sz="2400" dirty="0"/>
+            <a:endParaRPr lang="en-US" sz="2550" dirty="0"/>
           </a:p>
         </p:txBody>
       </p:sp>
@@ -6157,7 +6153,7 @@
               <a:buNone/>
             </a:pPr>
             <a:r>
-              <a:rPr lang="en-US" sz="2400" b="1" dirty="0" spc="-15" kern="0">
+              <a:rPr lang="en-US" sz="2550" b="1" dirty="0" spc="-15" kern="0">
                 <a:solidFill>
                   <a:srgbClr val="F3EEE3"/>
                 </a:solidFill>
@@ -6167,7 +6163,7 @@
               </a:rPr>
               <a:t>Backend</a:t>
             </a:r>
-            <a:endParaRPr lang="en-US" sz="2400" dirty="0"/>
+            <a:endParaRPr lang="en-US" sz="2550" dirty="0"/>
           </a:p>
         </p:txBody>
       </p:sp>
@@ -6246,13 +6242,13 @@
               <a:buNone/>
             </a:pPr>
             <a:r>
-              <a:rPr lang="en-US" sz="2550" b="1" dirty="0" spc="5" kern="0">
+              <a:rPr lang="en-US" sz="2550" b="1" dirty="0" spc="-6" kern="0">
                 <a:solidFill>
                   <a:srgbClr val="F3EEE3"/>
                 </a:solidFill>
-                <a:latin typeface="JetBrains Mono" pitchFamily="34" charset="0"/>
-                <a:ea typeface="JetBrains Mono" pitchFamily="34" charset="-122"/>
-                <a:cs typeface="JetBrains Mono" pitchFamily="34" charset="-120"/>
+                <a:latin typeface="Be Vietnam Pro" pitchFamily="34" charset="0"/>
+                <a:ea typeface="Be Vietnam Pro" pitchFamily="34" charset="-122"/>
+                <a:cs typeface="Be Vietnam Pro" pitchFamily="34" charset="-120"/>
               </a:rPr>
               <a:t>/api/users</a:t>
             </a:r>
@@ -6310,13 +6306,13 @@
               <a:buNone/>
             </a:pPr>
             <a:r>
-              <a:rPr lang="en-US" sz="2550" b="1" dirty="0" spc="5" kern="0">
+              <a:rPr lang="en-US" sz="2550" b="1" dirty="0" spc="-4" kern="0">
                 <a:solidFill>
                   <a:srgbClr val="7C93FF"/>
                 </a:solidFill>
-                <a:latin typeface="JetBrains Mono" pitchFamily="34" charset="0"/>
-                <a:ea typeface="JetBrains Mono" pitchFamily="34" charset="-122"/>
-                <a:cs typeface="JetBrains Mono" pitchFamily="34" charset="-120"/>
+                <a:latin typeface="Be Vietnam Pro" pitchFamily="34" charset="0"/>
+                <a:ea typeface="Be Vietnam Pro" pitchFamily="34" charset="-122"/>
+                <a:cs typeface="Be Vietnam Pro" pitchFamily="34" charset="-120"/>
               </a:rPr>
               <a:t>/users</a:t>
             </a:r>
@@ -6531,24 +6527,24 @@
               <a:buNone/>
             </a:pPr>
             <a:r>
-              <a:rPr lang="en-US" sz="2100" b="1" dirty="0" spc="-2" kern="0">
+              <a:rPr lang="en-US" sz="2100" b="1" dirty="0" spc="-11" kern="0">
                 <a:solidFill>
                   <a:srgbClr val="7C93FF"/>
                 </a:solidFill>
-                <a:latin typeface="JetBrains Mono" pitchFamily="34" charset="0"/>
-                <a:ea typeface="JetBrains Mono" pitchFamily="34" charset="-122"/>
-                <a:cs typeface="JetBrains Mono" pitchFamily="34" charset="-120"/>
+                <a:latin typeface="Be Vietnam Pro" pitchFamily="34" charset="0"/>
+                <a:ea typeface="Be Vietnam Pro" pitchFamily="34" charset="-122"/>
+                <a:cs typeface="Be Vietnam Pro" pitchFamily="34" charset="-120"/>
               </a:rPr>
               <a:t>Host</a:t>
             </a:r>
             <a:r>
-              <a:rPr lang="en-US" sz="2100" b="1" dirty="0" spc="-3" kern="0">
+              <a:rPr lang="en-US" sz="2100" b="1" dirty="0" spc="-7" kern="0">
                 <a:solidFill>
                   <a:srgbClr val="7C93FF"/>
                 </a:solidFill>
-                <a:latin typeface="JetBrains Mono" pitchFamily="34" charset="0"/>
-                <a:ea typeface="JetBrains Mono" pitchFamily="34" charset="-122"/>
-                <a:cs typeface="JetBrains Mono" pitchFamily="34" charset="-120"/>
+                <a:latin typeface="Be Vietnam Pro" pitchFamily="34" charset="0"/>
+                <a:ea typeface="Be Vietnam Pro" pitchFamily="34" charset="-122"/>
+                <a:cs typeface="Be Vietnam Pro" pitchFamily="34" charset="-120"/>
               </a:rPr>
               <a:t> $host</a:t>
             </a:r>
@@ -6606,24 +6602,24 @@
               <a:buNone/>
             </a:pPr>
             <a:r>
-              <a:rPr lang="en-US" sz="2100" b="1" dirty="0" spc="-3" kern="0">
+              <a:rPr lang="en-US" sz="2100" b="1" dirty="0" spc="-24" kern="0">
                 <a:solidFill>
                   <a:srgbClr val="7C93FF"/>
                 </a:solidFill>
-                <a:latin typeface="JetBrains Mono" pitchFamily="34" charset="0"/>
-                <a:ea typeface="JetBrains Mono" pitchFamily="34" charset="-122"/>
-                <a:cs typeface="JetBrains Mono" pitchFamily="34" charset="-120"/>
+                <a:latin typeface="Be Vietnam Pro" pitchFamily="34" charset="0"/>
+                <a:ea typeface="Be Vietnam Pro" pitchFamily="34" charset="-122"/>
+                <a:cs typeface="Be Vietnam Pro" pitchFamily="34" charset="-120"/>
               </a:rPr>
               <a:t>X-Forwarded-For</a:t>
             </a:r>
             <a:r>
-              <a:rPr lang="en-US" sz="2100" b="1" dirty="0" spc="-2" kern="0">
+              <a:rPr lang="en-US" sz="2100" b="1" dirty="0" spc="-10" kern="0">
                 <a:solidFill>
                   <a:srgbClr val="7C93FF"/>
                 </a:solidFill>
-                <a:latin typeface="JetBrains Mono" pitchFamily="34" charset="0"/>
-                <a:ea typeface="JetBrains Mono" pitchFamily="34" charset="-122"/>
-                <a:cs typeface="JetBrains Mono" pitchFamily="34" charset="-120"/>
+                <a:latin typeface="Be Vietnam Pro" pitchFamily="34" charset="0"/>
+                <a:ea typeface="Be Vietnam Pro" pitchFamily="34" charset="-122"/>
+                <a:cs typeface="Be Vietnam Pro" pitchFamily="34" charset="-120"/>
               </a:rPr>
               <a:t> $remote_addr</a:t>
             </a:r>
@@ -8985,17 +8981,17 @@
               <a:buNone/>
             </a:pPr>
             <a:r>
-              <a:rPr lang="en-US" sz="2250" dirty="0" kern="0">
-                <a:solidFill>
-                  <a:srgbClr val="14161C"/>
-                </a:solidFill>
-                <a:latin typeface="JetBrains Mono ExtraBold" pitchFamily="34" charset="0"/>
-                <a:ea typeface="JetBrains Mono ExtraBold" pitchFamily="34" charset="-122"/>
-                <a:cs typeface="JetBrains Mono ExtraBold" pitchFamily="34" charset="-120"/>
+              <a:rPr lang="en-US" sz="2550" dirty="0" spc="1" kern="0">
+                <a:solidFill>
+                  <a:srgbClr val="14161C"/>
+                </a:solidFill>
+                <a:latin typeface="Be Vietnam Pro ExtraBold" pitchFamily="34" charset="0"/>
+                <a:ea typeface="Be Vietnam Pro ExtraBold" pitchFamily="34" charset="-122"/>
+                <a:cs typeface="Be Vietnam Pro ExtraBold" pitchFamily="34" charset="-120"/>
               </a:rPr>
               <a:t>1.29.7</a:t>
             </a:r>
-            <a:endParaRPr lang="en-US" sz="2250" dirty="0"/>
+            <a:endParaRPr lang="en-US" sz="2550" dirty="0"/>
           </a:p>
         </p:txBody>
       </p:sp>
@@ -9272,26 +9268,37 @@
               <a:buNone/>
             </a:pPr>
             <a:r>
-              <a:rPr lang="en-US" sz="2100" b="1" dirty="0" spc="-2" kern="0">
+              <a:rPr lang="en-US" sz="2100" b="1" dirty="0" spc="-20" kern="0">
                 <a:solidFill>
                   <a:srgbClr val="F3EEE3"/>
                 </a:solidFill>
-                <a:latin typeface="JetBrains Mono" pitchFamily="34" charset="0"/>
-                <a:ea typeface="JetBrains Mono" pitchFamily="34" charset="-122"/>
-                <a:cs typeface="JetBrains Mono" pitchFamily="34" charset="-120"/>
+                <a:latin typeface="Be Vietnam Pro" pitchFamily="34" charset="0"/>
+                <a:ea typeface="Be Vietnam Pro" pitchFamily="34" charset="-122"/>
+                <a:cs typeface="Be Vietnam Pro" pitchFamily="34" charset="-120"/>
               </a:rPr>
               <a:t>keepalive</a:t>
             </a:r>
             <a:r>
-              <a:rPr lang="en-US" sz="2100" b="1" dirty="0" spc="-3" kern="0">
+              <a:rPr lang="en-US" sz="2100" b="1" dirty="0" spc="-12" kern="0">
                 <a:solidFill>
                   <a:srgbClr val="F3EEE3"/>
                 </a:solidFill>
-                <a:latin typeface="JetBrains Mono" pitchFamily="34" charset="0"/>
-                <a:ea typeface="JetBrains Mono" pitchFamily="34" charset="-122"/>
-                <a:cs typeface="JetBrains Mono" pitchFamily="34" charset="-120"/>
-              </a:rPr>
-              <a:t> (trong upstream)</a:t>
+                <a:latin typeface="Be Vietnam Pro" pitchFamily="34" charset="0"/>
+                <a:ea typeface="Be Vietnam Pro" pitchFamily="34" charset="-122"/>
+                <a:cs typeface="Be Vietnam Pro" pitchFamily="34" charset="-120"/>
+              </a:rPr>
+              <a:t> (trong</a:t>
+            </a:r>
+            <a:r>
+              <a:rPr lang="en-US" sz="2100" b="1" dirty="0" spc="-9" kern="0">
+                <a:solidFill>
+                  <a:srgbClr val="F3EEE3"/>
+                </a:solidFill>
+                <a:latin typeface="Be Vietnam Pro" pitchFamily="34" charset="0"/>
+                <a:ea typeface="Be Vietnam Pro" pitchFamily="34" charset="-122"/>
+                <a:cs typeface="Be Vietnam Pro" pitchFamily="34" charset="-120"/>
+              </a:rPr>
+              <a:t> upstream)</a:t>
             </a:r>
             <a:endParaRPr lang="en-US" sz="2100" dirty="0"/>
           </a:p>
@@ -9349,24 +9356,24 @@
               <a:buNone/>
             </a:pPr>
             <a:r>
-              <a:rPr lang="en-US" sz="2100" b="1" dirty="0" spc="-3" kern="0">
+              <a:rPr lang="en-US" sz="2100" b="1" dirty="0" spc="-12" kern="0">
                 <a:solidFill>
                   <a:srgbClr val="F3EEE3"/>
                 </a:solidFill>
-                <a:latin typeface="JetBrains Mono" pitchFamily="34" charset="0"/>
-                <a:ea typeface="JetBrains Mono" pitchFamily="34" charset="-122"/>
-                <a:cs typeface="JetBrains Mono" pitchFamily="34" charset="-120"/>
+                <a:latin typeface="Be Vietnam Pro" pitchFamily="34" charset="0"/>
+                <a:ea typeface="Be Vietnam Pro" pitchFamily="34" charset="-122"/>
+                <a:cs typeface="Be Vietnam Pro" pitchFamily="34" charset="-120"/>
               </a:rPr>
               <a:t>proxy_http_version</a:t>
             </a:r>
             <a:r>
-              <a:rPr lang="en-US" sz="2100" b="1" dirty="0" spc="0" kern="0">
+              <a:rPr lang="en-US" sz="2100" b="1" dirty="0" spc="2" kern="0">
                 <a:solidFill>
                   <a:srgbClr val="F3EEE3"/>
                 </a:solidFill>
-                <a:latin typeface="JetBrains Mono" pitchFamily="34" charset="0"/>
-                <a:ea typeface="JetBrains Mono" pitchFamily="34" charset="-122"/>
-                <a:cs typeface="JetBrains Mono" pitchFamily="34" charset="-120"/>
+                <a:latin typeface="Be Vietnam Pro" pitchFamily="34" charset="0"/>
+                <a:ea typeface="Be Vietnam Pro" pitchFamily="34" charset="-122"/>
+                <a:cs typeface="Be Vietnam Pro" pitchFamily="34" charset="-120"/>
               </a:rPr>
               <a:t> 1.1</a:t>
             </a:r>
@@ -9426,26 +9433,37 @@
               <a:buNone/>
             </a:pPr>
             <a:r>
+              <a:rPr lang="en-US" sz="2100" b="1" dirty="0" spc="-11" kern="0">
+                <a:solidFill>
+                  <a:srgbClr val="F3EEE3"/>
+                </a:solidFill>
+                <a:latin typeface="Be Vietnam Pro" pitchFamily="34" charset="0"/>
+                <a:ea typeface="Be Vietnam Pro" pitchFamily="34" charset="-122"/>
+                <a:cs typeface="Be Vietnam Pro" pitchFamily="34" charset="-120"/>
+              </a:rPr>
+              <a:t>proxy_set_header</a:t>
+            </a:r>
+            <a:r>
+              <a:rPr lang="en-US" sz="2100" b="1" dirty="0" spc="-6" kern="0">
+                <a:solidFill>
+                  <a:srgbClr val="F3EEE3"/>
+                </a:solidFill>
+                <a:latin typeface="Be Vietnam Pro" pitchFamily="34" charset="0"/>
+                <a:ea typeface="Be Vietnam Pro" pitchFamily="34" charset="-122"/>
+                <a:cs typeface="Be Vietnam Pro" pitchFamily="34" charset="-120"/>
+              </a:rPr>
+              <a:t> Connection</a:t>
+            </a:r>
+            <a:r>
               <a:rPr lang="en-US" sz="2100" b="1" dirty="0" spc="-3" kern="0">
                 <a:solidFill>
                   <a:srgbClr val="F3EEE3"/>
                 </a:solidFill>
-                <a:latin typeface="JetBrains Mono" pitchFamily="34" charset="0"/>
-                <a:ea typeface="JetBrains Mono" pitchFamily="34" charset="-122"/>
-                <a:cs typeface="JetBrains Mono" pitchFamily="34" charset="-120"/>
-              </a:rPr>
-              <a:t>proxy_set_header</a:t>
-            </a:r>
-            <a:r>
-              <a:rPr lang="en-US" sz="2100" b="1" dirty="0" spc="-2" kern="0">
-                <a:solidFill>
-                  <a:srgbClr val="F3EEE3"/>
-                </a:solidFill>
-                <a:latin typeface="JetBrains Mono" pitchFamily="34" charset="0"/>
-                <a:ea typeface="JetBrains Mono" pitchFamily="34" charset="-122"/>
-                <a:cs typeface="JetBrains Mono" pitchFamily="34" charset="-120"/>
-              </a:rPr>
-              <a:t> Connection ""</a:t>
+                <a:latin typeface="Be Vietnam Pro" pitchFamily="34" charset="0"/>
+                <a:ea typeface="Be Vietnam Pro" pitchFamily="34" charset="-122"/>
+                <a:cs typeface="Be Vietnam Pro" pitchFamily="34" charset="-120"/>
+              </a:rPr>
+              <a:t> ""</a:t>
             </a:r>
             <a:endParaRPr lang="en-US" sz="2100" dirty="0"/>
           </a:p>
@@ -10536,15 +10554,26 @@
               <a:buNone/>
             </a:pPr>
             <a:r>
-              <a:rPr lang="en-US" sz="2550" b="1" dirty="0" spc="5" kern="0">
+              <a:rPr lang="en-US" sz="2550" b="1" dirty="0" spc="-1" kern="0">
                 <a:solidFill>
                   <a:srgbClr val="F3EEE3"/>
                 </a:solidFill>
-                <a:latin typeface="JetBrains Mono" pitchFamily="34" charset="0"/>
-                <a:ea typeface="JetBrains Mono" pitchFamily="34" charset="-122"/>
-                <a:cs typeface="JetBrains Mono" pitchFamily="34" charset="-120"/>
-              </a:rPr>
-              <a:t>nginx -t</a:t>
+                <a:latin typeface="Be Vietnam Pro" pitchFamily="34" charset="0"/>
+                <a:ea typeface="Be Vietnam Pro" pitchFamily="34" charset="-122"/>
+                <a:cs typeface="Be Vietnam Pro" pitchFamily="34" charset="-120"/>
+              </a:rPr>
+              <a:t>nginx</a:t>
+            </a:r>
+            <a:r>
+              <a:rPr lang="en-US" sz="2550" b="1" dirty="0" spc="0" kern="0">
+                <a:solidFill>
+                  <a:srgbClr val="F3EEE3"/>
+                </a:solidFill>
+                <a:latin typeface="Be Vietnam Pro" pitchFamily="34" charset="0"/>
+                <a:ea typeface="Be Vietnam Pro" pitchFamily="34" charset="-122"/>
+                <a:cs typeface="Be Vietnam Pro" pitchFamily="34" charset="-120"/>
+              </a:rPr>
+              <a:t> -t</a:t>
             </a:r>
             <a:endParaRPr lang="en-US" sz="2550" dirty="0"/>
           </a:p>
@@ -10684,15 +10713,37 @@
               <a:buNone/>
             </a:pPr>
             <a:r>
-              <a:rPr lang="en-US" sz="2550" b="1" dirty="0" spc="5" kern="0">
-                <a:solidFill>
-                  <a:srgbClr val="14161C"/>
-                </a:solidFill>
-                <a:latin typeface="JetBrains Mono" pitchFamily="34" charset="0"/>
-                <a:ea typeface="JetBrains Mono" pitchFamily="34" charset="-122"/>
-                <a:cs typeface="JetBrains Mono" pitchFamily="34" charset="-120"/>
-              </a:rPr>
-              <a:t>nginx -s reload</a:t>
+              <a:rPr lang="en-US" sz="2550" b="1" dirty="0" spc="-1" kern="0">
+                <a:solidFill>
+                  <a:srgbClr val="14161C"/>
+                </a:solidFill>
+                <a:latin typeface="Be Vietnam Pro" pitchFamily="34" charset="0"/>
+                <a:ea typeface="Be Vietnam Pro" pitchFamily="34" charset="-122"/>
+                <a:cs typeface="Be Vietnam Pro" pitchFamily="34" charset="-120"/>
+              </a:rPr>
+              <a:t>nginx</a:t>
+            </a:r>
+            <a:r>
+              <a:rPr lang="en-US" sz="2550" b="1" dirty="0" spc="-3" kern="0">
+                <a:solidFill>
+                  <a:srgbClr val="14161C"/>
+                </a:solidFill>
+                <a:latin typeface="Be Vietnam Pro" pitchFamily="34" charset="0"/>
+                <a:ea typeface="Be Vietnam Pro" pitchFamily="34" charset="-122"/>
+                <a:cs typeface="Be Vietnam Pro" pitchFamily="34" charset="-120"/>
+              </a:rPr>
+              <a:t> -s</a:t>
+            </a:r>
+            <a:r>
+              <a:rPr lang="en-US" sz="2550" b="1" dirty="0" spc="-12" kern="0">
+                <a:solidFill>
+                  <a:srgbClr val="14161C"/>
+                </a:solidFill>
+                <a:latin typeface="Be Vietnam Pro" pitchFamily="34" charset="0"/>
+                <a:ea typeface="Be Vietnam Pro" pitchFamily="34" charset="-122"/>
+                <a:cs typeface="Be Vietnam Pro" pitchFamily="34" charset="-120"/>
+              </a:rPr>
+              <a:t> reload</a:t>
             </a:r>
             <a:endParaRPr lang="en-US" sz="2550" dirty="0"/>
           </a:p>
@@ -11044,44 +11095,66 @@
                 <a:solidFill>
                   <a:srgbClr val="F3EEE3"/>
                 </a:solidFill>
-                <a:latin typeface="JetBrains Mono" pitchFamily="34" charset="0"/>
-                <a:ea typeface="JetBrains Mono" pitchFamily="34" charset="-122"/>
-                <a:cs typeface="JetBrains Mono" pitchFamily="34" charset="-120"/>
+                <a:latin typeface="Be Vietnam Pro" pitchFamily="34" charset="0"/>
+                <a:ea typeface="Be Vietnam Pro" pitchFamily="34" charset="-122"/>
+                <a:cs typeface="Be Vietnam Pro" pitchFamily="34" charset="-120"/>
               </a:rPr>
               <a:t>nginx</a:t>
             </a:r>
             <a:r>
+              <a:rPr lang="en-US" sz="3600" b="1" dirty="0" spc="1" kern="0">
+                <a:solidFill>
+                  <a:srgbClr val="F3EEE3"/>
+                </a:solidFill>
+                <a:latin typeface="Be Vietnam Pro" pitchFamily="34" charset="0"/>
+                <a:ea typeface="Be Vietnam Pro" pitchFamily="34" charset="-122"/>
+                <a:cs typeface="Be Vietnam Pro" pitchFamily="34" charset="-120"/>
+              </a:rPr>
+              <a:t> -t</a:t>
+            </a:r>
+            <a:r>
+              <a:rPr lang="en-US" sz="3600" b="1" dirty="0" spc="-1" kern="0">
+                <a:solidFill>
+                  <a:srgbClr val="F3EEE3"/>
+                </a:solidFill>
+                <a:latin typeface="Be Vietnam Pro" pitchFamily="34" charset="0"/>
+                <a:ea typeface="Be Vietnam Pro" pitchFamily="34" charset="-122"/>
+                <a:cs typeface="Be Vietnam Pro" pitchFamily="34" charset="-120"/>
+              </a:rPr>
+              <a:t> &amp;&amp;</a:t>
+            </a:r>
+            <a:r>
               <a:rPr lang="en-US" sz="3600" b="1" dirty="0" spc="-2" kern="0">
                 <a:solidFill>
                   <a:srgbClr val="F3EEE3"/>
                 </a:solidFill>
-                <a:latin typeface="JetBrains Mono" pitchFamily="34" charset="0"/>
-                <a:ea typeface="JetBrains Mono" pitchFamily="34" charset="-122"/>
-                <a:cs typeface="JetBrains Mono" pitchFamily="34" charset="-120"/>
-              </a:rPr>
-              <a:t> -t &amp;&amp;</a:t>
-            </a:r>
-            <a:r>
-              <a:rPr lang="en-US" sz="3600" b="1" dirty="0" spc="-3" kern="0">
+                <a:latin typeface="Be Vietnam Pro" pitchFamily="34" charset="0"/>
+                <a:ea typeface="Be Vietnam Pro" pitchFamily="34" charset="-122"/>
+                <a:cs typeface="Be Vietnam Pro" pitchFamily="34" charset="-120"/>
+              </a:rPr>
+              <a:t> nginx</a:t>
+            </a:r>
+            <a:r>
+              <a:rPr lang="en-US" sz="3600" b="1" dirty="0" spc="-1" kern="0">
                 <a:solidFill>
                   <a:srgbClr val="F3EEE3"/>
                 </a:solidFill>
-                <a:latin typeface="JetBrains Mono" pitchFamily="34" charset="0"/>
-                <a:ea typeface="JetBrains Mono" pitchFamily="34" charset="-122"/>
-                <a:cs typeface="JetBrains Mono" pitchFamily="34" charset="-120"/>
-              </a:rPr>
-              <a:t> nginx</a:t>
-            </a:r>
-            <a:r>
-              <a:rPr lang="en-US" sz="3600" b="1" dirty="0" spc="-2" kern="0">
+                <a:latin typeface="Be Vietnam Pro" pitchFamily="34" charset="0"/>
+                <a:ea typeface="Be Vietnam Pro" pitchFamily="34" charset="-122"/>
+                <a:cs typeface="Be Vietnam Pro" pitchFamily="34" charset="-120"/>
+              </a:rPr>
+              <a:t> -s</a:t>
+            </a:r>
+            <a:r>
+              <a:rPr lang="en-US" sz="3600" b="1" dirty="0" spc="-19" kern="0">
                 <a:solidFill>
                   <a:srgbClr val="F3EEE3"/>
                 </a:solidFill>
-                <a:latin typeface="JetBrains Mono" pitchFamily="34" charset="0"/>
-                <a:ea typeface="JetBrains Mono" pitchFamily="34" charset="-122"/>
-                <a:cs typeface="JetBrains Mono" pitchFamily="34" charset="-120"/>
-              </a:rPr>
-              <a:t> -s reload</a:t>
+                <a:latin typeface="Be Vietnam Pro" pitchFamily="34" charset="0"/>
+                <a:ea typeface="Be Vietnam Pro" pitchFamily="34" charset="-122"/>
+                <a:cs typeface="Be Vietnam Pro" pitchFamily="34" charset="-120"/>
+              </a:rPr>
+              <a:t> reload</a:t>
             </a:r>
             <a:endParaRPr lang="en-US" sz="3600" dirty="0"/>
           </a:p>
@@ -13230,7 +13303,7 @@
           <a:ln/>
         </p:spPr>
         <p:txBody>
-          <a:bodyPr wrap="square" lIns="0" tIns="209550" rIns="0" bIns="-209550" rtlCol="0" anchor="t"/>
+          <a:bodyPr wrap="square" lIns="0" tIns="223838" rIns="0" bIns="-223838" rtlCol="0" anchor="t"/>
           <a:lstStyle/>
           <a:p>
             <a:pPr algn="l" indent="0" marL="0">
@@ -13240,13 +13313,13 @@
               <a:buNone/>
             </a:pPr>
             <a:r>
-              <a:rPr lang="en-US" sz="15000" dirty="0" kern="0">
-                <a:solidFill>
-                  <a:srgbClr val="14161C"/>
-                </a:solidFill>
-                <a:latin typeface="JetBrains Mono ExtraBold" pitchFamily="34" charset="0"/>
-                <a:ea typeface="JetBrains Mono ExtraBold" pitchFamily="34" charset="-122"/>
-                <a:cs typeface="JetBrains Mono ExtraBold" pitchFamily="34" charset="-120"/>
+              <a:rPr lang="en-US" sz="15000" dirty="0" spc="-5" kern="0">
+                <a:solidFill>
+                  <a:srgbClr val="14161C"/>
+                </a:solidFill>
+                <a:latin typeface="Be Vietnam Pro ExtraBold" pitchFamily="34" charset="0"/>
+                <a:ea typeface="Be Vietnam Pro ExtraBold" pitchFamily="34" charset="-122"/>
+                <a:cs typeface="Be Vietnam Pro ExtraBold" pitchFamily="34" charset="-120"/>
               </a:rPr>
               <a:t>/users</a:t>
             </a:r>
@@ -14552,13 +14625,13 @@
               <a:buNone/>
             </a:pPr>
             <a:r>
-              <a:rPr lang="en-US" sz="2550" dirty="0" spc="5" kern="0">
+              <a:rPr lang="en-US" sz="2550" dirty="0" spc="-10" kern="0">
                 <a:solidFill>
                   <a:srgbClr val="1F3FD1"/>
                 </a:solidFill>
-                <a:latin typeface="JetBrains Mono ExtraBold" pitchFamily="34" charset="0"/>
-                <a:ea typeface="JetBrains Mono ExtraBold" pitchFamily="34" charset="-122"/>
-                <a:cs typeface="JetBrains Mono ExtraBold" pitchFamily="34" charset="-120"/>
+                <a:latin typeface="Be Vietnam Pro ExtraBold" pitchFamily="34" charset="0"/>
+                <a:ea typeface="Be Vietnam Pro ExtraBold" pitchFamily="34" charset="-122"/>
+                <a:cs typeface="Be Vietnam Pro ExtraBold" pitchFamily="34" charset="-120"/>
               </a:rPr>
               <a:t>Host</a:t>
             </a:r>
@@ -14767,13 +14840,13 @@
               <a:buNone/>
             </a:pPr>
             <a:r>
-              <a:rPr lang="en-US" sz="2550" dirty="0" spc="5" kern="0">
+              <a:rPr lang="en-US" sz="2550" dirty="0" spc="-27" kern="0">
                 <a:solidFill>
                   <a:srgbClr val="1F3FD1"/>
                 </a:solidFill>
-                <a:latin typeface="JetBrains Mono ExtraBold" pitchFamily="34" charset="0"/>
-                <a:ea typeface="JetBrains Mono ExtraBold" pitchFamily="34" charset="-122"/>
-                <a:cs typeface="JetBrains Mono ExtraBold" pitchFamily="34" charset="-120"/>
+                <a:latin typeface="Be Vietnam Pro ExtraBold" pitchFamily="34" charset="0"/>
+                <a:ea typeface="Be Vietnam Pro ExtraBold" pitchFamily="34" charset="-122"/>
+                <a:cs typeface="Be Vietnam Pro ExtraBold" pitchFamily="34" charset="-120"/>
               </a:rPr>
               <a:t>X-Forwarded-For</a:t>
             </a:r>
@@ -14938,13 +15011,13 @@
               <a:buNone/>
             </a:pPr>
             <a:r>
-              <a:rPr lang="en-US" sz="2550" dirty="0" spc="5" kern="0">
+              <a:rPr lang="en-US" sz="2550" dirty="0" spc="-10" kern="0">
                 <a:solidFill>
                   <a:srgbClr val="1F3FD1"/>
                 </a:solidFill>
-                <a:latin typeface="JetBrains Mono ExtraBold" pitchFamily="34" charset="0"/>
-                <a:ea typeface="JetBrains Mono ExtraBold" pitchFamily="34" charset="-122"/>
-                <a:cs typeface="JetBrains Mono ExtraBold" pitchFamily="34" charset="-120"/>
+                <a:latin typeface="Be Vietnam Pro ExtraBold" pitchFamily="34" charset="0"/>
+                <a:ea typeface="Be Vietnam Pro ExtraBold" pitchFamily="34" charset="-122"/>
+                <a:cs typeface="Be Vietnam Pro ExtraBold" pitchFamily="34" charset="-120"/>
               </a:rPr>
               <a:t>$proxy_add_x_forwarded_for</a:t>
             </a:r>
@@ -15131,13 +15204,13 @@
               <a:buNone/>
             </a:pPr>
             <a:r>
-              <a:rPr lang="en-US" sz="2550" dirty="0" spc="5" kern="0">
+              <a:rPr lang="en-US" sz="2550" dirty="0" spc="-10" kern="0">
                 <a:solidFill>
                   <a:srgbClr val="B45309"/>
                 </a:solidFill>
-                <a:latin typeface="JetBrains Mono ExtraBold" pitchFamily="34" charset="0"/>
-                <a:ea typeface="JetBrains Mono ExtraBold" pitchFamily="34" charset="-122"/>
-                <a:cs typeface="JetBrains Mono ExtraBold" pitchFamily="34" charset="-120"/>
+                <a:latin typeface="Be Vietnam Pro ExtraBold" pitchFamily="34" charset="0"/>
+                <a:ea typeface="Be Vietnam Pro ExtraBold" pitchFamily="34" charset="-122"/>
+                <a:cs typeface="Be Vietnam Pro ExtraBold" pitchFamily="34" charset="-120"/>
               </a:rPr>
               <a:t>proxy_connect_timeout</a:t>
             </a:r>
@@ -15335,15 +15408,37 @@
               <a:buNone/>
             </a:pPr>
             <a:r>
-              <a:rPr lang="en-US" sz="2550" dirty="0" spc="5" kern="0">
+              <a:rPr lang="en-US" sz="2550" dirty="0" spc="-4" kern="0">
                 <a:solidFill>
                   <a:srgbClr val="E8472B"/>
                 </a:solidFill>
-                <a:latin typeface="JetBrains Mono ExtraBold" pitchFamily="34" charset="0"/>
-                <a:ea typeface="JetBrains Mono ExtraBold" pitchFamily="34" charset="-122"/>
-                <a:cs typeface="JetBrains Mono ExtraBold" pitchFamily="34" charset="-120"/>
-              </a:rPr>
-              <a:t>nginx -s reload</a:t>
+                <a:latin typeface="Be Vietnam Pro ExtraBold" pitchFamily="34" charset="0"/>
+                <a:ea typeface="Be Vietnam Pro ExtraBold" pitchFamily="34" charset="-122"/>
+                <a:cs typeface="Be Vietnam Pro ExtraBold" pitchFamily="34" charset="-120"/>
+              </a:rPr>
+              <a:t>nginx</a:t>
+            </a:r>
+            <a:r>
+              <a:rPr lang="en-US" sz="2550" dirty="0" spc="0" kern="0">
+                <a:solidFill>
+                  <a:srgbClr val="E8472B"/>
+                </a:solidFill>
+                <a:latin typeface="Be Vietnam Pro ExtraBold" pitchFamily="34" charset="0"/>
+                <a:ea typeface="Be Vietnam Pro ExtraBold" pitchFamily="34" charset="-122"/>
+                <a:cs typeface="Be Vietnam Pro ExtraBold" pitchFamily="34" charset="-120"/>
+              </a:rPr>
+              <a:t> -s</a:t>
+            </a:r>
+            <a:r>
+              <a:rPr lang="en-US" sz="2550" dirty="0" spc="-9" kern="0">
+                <a:solidFill>
+                  <a:srgbClr val="E8472B"/>
+                </a:solidFill>
+                <a:latin typeface="Be Vietnam Pro ExtraBold" pitchFamily="34" charset="0"/>
+                <a:ea typeface="Be Vietnam Pro ExtraBold" pitchFamily="34" charset="-122"/>
+                <a:cs typeface="Be Vietnam Pro ExtraBold" pitchFamily="34" charset="-120"/>
+              </a:rPr>
+              <a:t> reload</a:t>
             </a:r>
             <a:endParaRPr lang="en-US" sz="2550" dirty="0"/>
           </a:p>

--- a/system-design-101/vi/lessons/sd-13-024/slides/sd-13-024.pptx
+++ b/system-design-101/vi/lessons/sd-13-024/slides/sd-13-024.pptx
@@ -9279,6 +9279,17 @@
               <a:t>keepalive</a:t>
             </a:r>
             <a:r>
+              <a:rPr lang="en-US" sz="2100" b="1" dirty="0" spc="-1" kern="0">
+                <a:solidFill>
+                  <a:srgbClr val="F3EEE3"/>
+                </a:solidFill>
+                <a:latin typeface="Be Vietnam Pro" pitchFamily="34" charset="0"/>
+                <a:ea typeface="Be Vietnam Pro" pitchFamily="34" charset="-122"/>
+                <a:cs typeface="Be Vietnam Pro" pitchFamily="34" charset="-120"/>
+              </a:rPr>
+              <a:t> 32;</a:t>
+            </a:r>
+            <a:r>
               <a:rPr lang="en-US" sz="2100" b="1" dirty="0" spc="-12" kern="0">
                 <a:solidFill>
                   <a:srgbClr val="F3EEE3"/>
